--- a/static/decks/BKMB.OM.pptx
+++ b/static/decks/BKMB.OM.pptx
@@ -4327,7 +4327,7 @@
                 </a:solidFill>
                 <a:latin typeface="Calibri"/>
               </a:rPr>
-              <a:t>12.4x</a:t>
+              <a:t>12.3x</a:t>
             </a:r>
           </a:p>
         </p:txBody>
@@ -4397,7 +4397,7 @@
                 </a:solidFill>
                 <a:latin typeface="Calibri"/>
               </a:rPr>
-              <a:t>4.75%</a:t>
+              <a:t>4.79%</a:t>
             </a:r>
           </a:p>
         </p:txBody>
@@ -6002,7 +6002,7 @@
                 </a:solidFill>
                 <a:latin typeface="Calibri"/>
               </a:rPr>
-              <a:t>Source: investing, marketscreener  |  Generated 13 May 2026  |  Analyst: Jabal Research</a:t>
+              <a:t>Source: investing, ishares, marketscreener  |  Generated 13 May 2026  |  Analyst: Jabal Research</a:t>
             </a:r>
           </a:p>
         </p:txBody>
@@ -6548,7 +6548,7 @@
                 </a:solidFill>
                 <a:latin typeface="Calibri"/>
               </a:rPr>
-              <a:t>Jabal maintains a constructive view into the upcoming print. Bank Muscat sits in the Financials sector (Banks). The shares trade at a P/E around 12.4x trailing earnings. Macro context: local-economy GDP growth recently at 1.6%. The thesis hinges on three factors: demand trajectory through H2, feedstock/input-cost discipline, and management's tone on guidance during the call. We expect the print itself to be within consensus bounds; the read on forward commentary is the swing factor.</a:t>
+              <a:t>Jabal maintains a constructive view into the upcoming print. Bank Muscat sits in the Financials sector (Banks). Street consensus is buy (3 analysts covering); consensus target 0.47. The shares trade at a P/E around 12.3x trailing earnings. Macro context: local-economy GDP growth recently at 1.6%. The thesis hinges on three factors: demand trajectory through H2, feedstock/input-cost discipline, and management's tone on guidance during the call. We expect the print itself to be within consensus bounds; the read on forward commentary is the swing factor.</a:t>
             </a:r>
           </a:p>
         </p:txBody>
@@ -7772,7 +7772,7 @@
                 </a:solidFill>
                 <a:latin typeface="Calibri"/>
               </a:rPr>
-              <a:t>4.75%</a:t>
+              <a:t>4.79%</a:t>
             </a:r>
           </a:p>
         </p:txBody>
@@ -7877,7 +7877,7 @@
                 </a:solidFill>
                 <a:latin typeface="Calibri"/>
               </a:rPr>
-              <a:t>Consensus: —</a:t>
+              <a:t>Consensus: —  ·  3 analysts covering</a:t>
             </a:r>
           </a:p>
         </p:txBody>
@@ -8963,7 +8963,7 @@
                 </a:solidFill>
                 <a:latin typeface="Calibri"/>
               </a:rPr>
-              <a:t>Source: investing, marketscreener  |  Generated 13 May 2026  |  Analyst: Jabal Research</a:t>
+              <a:t>Source: investing, ishares, marketscreener  |  Generated 13 May 2026  |  Analyst: Jabal Research</a:t>
             </a:r>
           </a:p>
         </p:txBody>
@@ -9538,7 +9538,7 @@
         <p:spPr>
           <a:xfrm>
             <a:off x="4023360" y="2121408"/>
-            <a:ext cx="586039" cy="73152"/>
+            <a:ext cx="594521" cy="73152"/>
           </a:xfrm>
           <a:prstGeom prst="rect">
             <a:avLst/>
@@ -9580,7 +9580,7 @@
         </p:nvSpPr>
         <p:spPr>
           <a:xfrm>
-            <a:off x="4563679" y="2103120"/>
+            <a:off x="4572161" y="2103120"/>
             <a:ext cx="91440" cy="109728"/>
           </a:xfrm>
           <a:prstGeom prst="ellipse">
@@ -9623,7 +9623,7 @@
         </p:nvSpPr>
         <p:spPr>
           <a:xfrm>
-            <a:off x="4655119" y="2084831"/>
+            <a:off x="4663601" y="2084831"/>
             <a:ext cx="411480" cy="182880"/>
           </a:xfrm>
           <a:prstGeom prst="rect">
@@ -9694,7 +9694,7 @@
         <p:spPr>
           <a:xfrm>
             <a:off x="4023360" y="2395727"/>
-            <a:ext cx="907117" cy="73152"/>
+            <a:ext cx="920245" cy="73152"/>
           </a:xfrm>
           <a:prstGeom prst="rect">
             <a:avLst/>
@@ -9736,7 +9736,7 @@
         </p:nvSpPr>
         <p:spPr>
           <a:xfrm>
-            <a:off x="4884757" y="2377439"/>
+            <a:off x="4897885" y="2377439"/>
             <a:ext cx="91440" cy="109728"/>
           </a:xfrm>
           <a:prstGeom prst="ellipse">
@@ -9779,7 +9779,7 @@
         </p:nvSpPr>
         <p:spPr>
           <a:xfrm>
-            <a:off x="4976197" y="2359151"/>
+            <a:off x="4989325" y="2359151"/>
             <a:ext cx="411480" cy="182880"/>
           </a:xfrm>
           <a:prstGeom prst="rect">
@@ -9850,7 +9850,7 @@
         <p:spPr>
           <a:xfrm>
             <a:off x="4023360" y="2670048"/>
-            <a:ext cx="907117" cy="73152"/>
+            <a:ext cx="920245" cy="73152"/>
           </a:xfrm>
           <a:prstGeom prst="rect">
             <a:avLst/>
@@ -9892,7 +9892,7 @@
         </p:nvSpPr>
         <p:spPr>
           <a:xfrm>
-            <a:off x="4884757" y="2651760"/>
+            <a:off x="4897885" y="2651760"/>
             <a:ext cx="91440" cy="109728"/>
           </a:xfrm>
           <a:prstGeom prst="ellipse">
@@ -9935,7 +9935,7 @@
         </p:nvSpPr>
         <p:spPr>
           <a:xfrm>
-            <a:off x="4976197" y="2633472"/>
+            <a:off x="4989325" y="2633472"/>
             <a:ext cx="411480" cy="182880"/>
           </a:xfrm>
           <a:prstGeom prst="rect">
@@ -10006,7 +10006,7 @@
         <p:spPr>
           <a:xfrm>
             <a:off x="4023360" y="2944368"/>
-            <a:ext cx="539758" cy="73152"/>
+            <a:ext cx="547569" cy="73152"/>
           </a:xfrm>
           <a:prstGeom prst="rect">
             <a:avLst/>
@@ -10048,7 +10048,7 @@
         </p:nvSpPr>
         <p:spPr>
           <a:xfrm>
-            <a:off x="4517398" y="2926079"/>
+            <a:off x="4525209" y="2926079"/>
             <a:ext cx="91440" cy="109728"/>
           </a:xfrm>
           <a:prstGeom prst="ellipse">
@@ -10091,7 +10091,7 @@
         </p:nvSpPr>
         <p:spPr>
           <a:xfrm>
-            <a:off x="4608838" y="2907791"/>
+            <a:off x="4616649" y="2907791"/>
             <a:ext cx="411480" cy="182880"/>
           </a:xfrm>
           <a:prstGeom prst="rect">
@@ -10162,7 +10162,7 @@
         <p:spPr>
           <a:xfrm>
             <a:off x="4023360" y="3218688"/>
-            <a:ext cx="936043" cy="73152"/>
+            <a:ext cx="949590" cy="73152"/>
           </a:xfrm>
           <a:prstGeom prst="rect">
             <a:avLst/>
@@ -10204,7 +10204,7 @@
         </p:nvSpPr>
         <p:spPr>
           <a:xfrm>
-            <a:off x="4913683" y="3200400"/>
+            <a:off x="4927230" y="3200400"/>
             <a:ext cx="91440" cy="109728"/>
           </a:xfrm>
           <a:prstGeom prst="ellipse">
@@ -10247,7 +10247,7 @@
         </p:nvSpPr>
         <p:spPr>
           <a:xfrm>
-            <a:off x="5005123" y="3182112"/>
+            <a:off x="5018670" y="3182112"/>
             <a:ext cx="411480" cy="182880"/>
           </a:xfrm>
           <a:prstGeom prst="rect">
@@ -10318,7 +10318,7 @@
         <p:spPr>
           <a:xfrm>
             <a:off x="4023360" y="3493008"/>
-            <a:ext cx="1745969" cy="73152"/>
+            <a:ext cx="1741894" cy="73152"/>
           </a:xfrm>
           <a:prstGeom prst="rect">
             <a:avLst/>
@@ -10360,7 +10360,7 @@
         </p:nvSpPr>
         <p:spPr>
           <a:xfrm>
-            <a:off x="5723609" y="3474720"/>
+            <a:off x="5719534" y="3474720"/>
             <a:ext cx="91440" cy="109728"/>
           </a:xfrm>
           <a:prstGeom prst="ellipse">
@@ -10403,7 +10403,7 @@
         </p:nvSpPr>
         <p:spPr>
           <a:xfrm>
-            <a:off x="5815049" y="3456432"/>
+            <a:off x="5810974" y="3456432"/>
             <a:ext cx="411480" cy="182880"/>
           </a:xfrm>
           <a:prstGeom prst="rect">
@@ -10425,7 +10425,7 @@
                 </a:solidFill>
                 <a:latin typeface="Calibri"/>
               </a:rPr>
-              <a:t>13.5x</a:t>
+              <a:t>13.4x</a:t>
             </a:r>
           </a:p>
         </p:txBody>
@@ -10474,7 +10474,7 @@
         <p:spPr>
           <a:xfrm>
             <a:off x="4023360" y="3767327"/>
-            <a:ext cx="1572414" cy="73152"/>
+            <a:ext cx="1565826" cy="73152"/>
           </a:xfrm>
           <a:prstGeom prst="rect">
             <a:avLst/>
@@ -10516,7 +10516,7 @@
         </p:nvSpPr>
         <p:spPr>
           <a:xfrm>
-            <a:off x="5550054" y="3749039"/>
+            <a:off x="5543466" y="3749039"/>
             <a:ext cx="91440" cy="109728"/>
           </a:xfrm>
           <a:prstGeom prst="ellipse">
@@ -10559,7 +10559,7 @@
         </p:nvSpPr>
         <p:spPr>
           <a:xfrm>
-            <a:off x="5641494" y="3730751"/>
+            <a:off x="5634906" y="3730751"/>
             <a:ext cx="411480" cy="182880"/>
           </a:xfrm>
           <a:prstGeom prst="rect">
@@ -10581,7 +10581,7 @@
                 </a:solidFill>
                 <a:latin typeface="Calibri"/>
               </a:rPr>
-              <a:t>12.9x</a:t>
+              <a:t>12.8x</a:t>
             </a:r>
           </a:p>
         </p:txBody>
@@ -10630,7 +10630,7 @@
         <p:spPr>
           <a:xfrm>
             <a:off x="4023360" y="4041647"/>
-            <a:ext cx="1427784" cy="73152"/>
+            <a:ext cx="1419103" cy="73152"/>
           </a:xfrm>
           <a:prstGeom prst="rect">
             <a:avLst/>
@@ -10672,7 +10672,7 @@
         </p:nvSpPr>
         <p:spPr>
           <a:xfrm>
-            <a:off x="5405424" y="4023359"/>
+            <a:off x="5396743" y="4023359"/>
             <a:ext cx="91440" cy="109728"/>
           </a:xfrm>
           <a:prstGeom prst="ellipse">
@@ -10715,7 +10715,7 @@
         </p:nvSpPr>
         <p:spPr>
           <a:xfrm>
-            <a:off x="5496864" y="4005071"/>
+            <a:off x="5488183" y="4005071"/>
             <a:ext cx="411480" cy="182880"/>
           </a:xfrm>
           <a:prstGeom prst="rect">
@@ -10737,7 +10737,7 @@
                 </a:solidFill>
                 <a:latin typeface="Calibri"/>
               </a:rPr>
-              <a:t>12.4x</a:t>
+              <a:t>12.3x</a:t>
             </a:r>
           </a:p>
         </p:txBody>
@@ -10877,7 +10877,7 @@
                 </a:solidFill>
                 <a:latin typeface="Calibri"/>
               </a:rPr>
-              <a:t>16x</a:t>
+              <a:t>15x</a:t>
             </a:r>
           </a:p>
         </p:txBody>
@@ -10890,7 +10890,7 @@
         </p:nvSpPr>
         <p:spPr>
           <a:xfrm>
-            <a:off x="5377992" y="4242816"/>
+            <a:off x="5369311" y="4242816"/>
             <a:ext cx="146304" cy="146304"/>
           </a:xfrm>
           <a:prstGeom prst="diamond">
@@ -10933,7 +10933,7 @@
         </p:nvSpPr>
         <p:spPr>
           <a:xfrm>
-            <a:off x="5542584" y="4224528"/>
+            <a:off x="5533903" y="4224528"/>
             <a:ext cx="1280160" cy="164592"/>
           </a:xfrm>
           <a:prstGeom prst="rect">
@@ -10955,7 +10955,7 @@
                 </a:solidFill>
                 <a:latin typeface="Calibri"/>
               </a:rPr>
-              <a:t>Current  (12.4x)</a:t>
+              <a:t>Current  (12.3x)</a:t>
             </a:r>
           </a:p>
         </p:txBody>
@@ -11295,7 +11295,217 @@
       </p:sp>
       <p:sp>
         <p:nvSpPr>
-          <p:cNvPr id="60" name="Rectangle 59"/>
+          <p:cNvPr id="60" name="TextBox 59"/>
+          <p:cNvSpPr txBox="1"/>
+          <p:nvPr/>
+        </p:nvSpPr>
+        <p:spPr>
+          <a:xfrm>
+            <a:off x="411480" y="5093208"/>
+            <a:ext cx="1874520" cy="256032"/>
+          </a:xfrm>
+          <a:prstGeom prst="rect">
+            <a:avLst/>
+          </a:prstGeom>
+          <a:noFill/>
+        </p:spPr>
+        <p:txBody>
+          <a:bodyPr wrap="square" lIns="0" rIns="0" tIns="0" bIns="0" anchor="t">
+            <a:spAutoFit/>
+          </a:bodyPr>
+          <a:lstStyle/>
+          <a:p>
+            <a:pPr algn="l"/>
+            <a:r>
+              <a:rPr sz="1000" b="0">
+                <a:solidFill>
+                  <a:srgbClr val="1A1A1A"/>
+                </a:solidFill>
+                <a:latin typeface="Calibri"/>
+              </a:rPr>
+              <a:t>iShares MSCI Emerging Markets ETF</a:t>
+            </a:r>
+          </a:p>
+        </p:txBody>
+      </p:sp>
+      <p:sp>
+        <p:nvSpPr>
+          <p:cNvPr id="61" name="TextBox 60"/>
+          <p:cNvSpPr txBox="1"/>
+          <p:nvPr/>
+        </p:nvSpPr>
+        <p:spPr>
+          <a:xfrm>
+            <a:off x="2331720" y="5093208"/>
+            <a:ext cx="960120" cy="256032"/>
+          </a:xfrm>
+          <a:prstGeom prst="rect">
+            <a:avLst/>
+          </a:prstGeom>
+          <a:noFill/>
+        </p:spPr>
+        <p:txBody>
+          <a:bodyPr wrap="square" lIns="0" rIns="0" tIns="0" bIns="0" anchor="t">
+            <a:spAutoFit/>
+          </a:bodyPr>
+          <a:lstStyle/>
+          <a:p>
+            <a:pPr algn="l"/>
+            <a:r>
+              <a:rPr sz="1000" b="0">
+                <a:solidFill>
+                  <a:srgbClr val="1A1A1A"/>
+                </a:solidFill>
+                <a:latin typeface="Calibri"/>
+              </a:rPr>
+              <a:t>EEM</a:t>
+            </a:r>
+          </a:p>
+        </p:txBody>
+      </p:sp>
+      <p:sp>
+        <p:nvSpPr>
+          <p:cNvPr id="62" name="TextBox 61"/>
+          <p:cNvSpPr txBox="1"/>
+          <p:nvPr/>
+        </p:nvSpPr>
+        <p:spPr>
+          <a:xfrm>
+            <a:off x="3337560" y="5093208"/>
+            <a:ext cx="960120" cy="256032"/>
+          </a:xfrm>
+          <a:prstGeom prst="rect">
+            <a:avLst/>
+          </a:prstGeom>
+          <a:noFill/>
+        </p:spPr>
+        <p:txBody>
+          <a:bodyPr wrap="square" lIns="0" rIns="0" tIns="0" bIns="0" anchor="t">
+            <a:spAutoFit/>
+          </a:bodyPr>
+          <a:lstStyle/>
+          <a:p>
+            <a:pPr algn="r"/>
+            <a:r>
+              <a:rPr sz="1000" b="0">
+                <a:solidFill>
+                  <a:srgbClr val="1A1A1A"/>
+                </a:solidFill>
+                <a:latin typeface="Calibri"/>
+              </a:rPr>
+              <a:t>—</a:t>
+            </a:r>
+          </a:p>
+        </p:txBody>
+      </p:sp>
+      <p:sp>
+        <p:nvSpPr>
+          <p:cNvPr id="63" name="TextBox 62"/>
+          <p:cNvSpPr txBox="1"/>
+          <p:nvPr/>
+        </p:nvSpPr>
+        <p:spPr>
+          <a:xfrm>
+            <a:off x="4343400" y="5093208"/>
+            <a:ext cx="594359" cy="256032"/>
+          </a:xfrm>
+          <a:prstGeom prst="rect">
+            <a:avLst/>
+          </a:prstGeom>
+          <a:noFill/>
+        </p:spPr>
+        <p:txBody>
+          <a:bodyPr wrap="square" lIns="0" rIns="0" tIns="0" bIns="0" anchor="t">
+            <a:spAutoFit/>
+          </a:bodyPr>
+          <a:lstStyle/>
+          <a:p>
+            <a:pPr algn="r"/>
+            <a:r>
+              <a:rPr sz="1000" b="0">
+                <a:solidFill>
+                  <a:srgbClr val="1A1A1A"/>
+                </a:solidFill>
+                <a:latin typeface="Calibri"/>
+              </a:rPr>
+              <a:t>—</a:t>
+            </a:r>
+          </a:p>
+        </p:txBody>
+      </p:sp>
+      <p:sp>
+        <p:nvSpPr>
+          <p:cNvPr id="64" name="TextBox 63"/>
+          <p:cNvSpPr txBox="1"/>
+          <p:nvPr/>
+        </p:nvSpPr>
+        <p:spPr>
+          <a:xfrm>
+            <a:off x="4983480" y="5093208"/>
+            <a:ext cx="685800" cy="256032"/>
+          </a:xfrm>
+          <a:prstGeom prst="rect">
+            <a:avLst/>
+          </a:prstGeom>
+          <a:noFill/>
+        </p:spPr>
+        <p:txBody>
+          <a:bodyPr wrap="square" lIns="0" rIns="0" tIns="0" bIns="0" anchor="t">
+            <a:spAutoFit/>
+          </a:bodyPr>
+          <a:lstStyle/>
+          <a:p>
+            <a:pPr algn="r"/>
+            <a:r>
+              <a:rPr sz="1000" b="0">
+                <a:solidFill>
+                  <a:srgbClr val="1A1A1A"/>
+                </a:solidFill>
+                <a:latin typeface="Calibri"/>
+              </a:rPr>
+              <a:t>—</a:t>
+            </a:r>
+          </a:p>
+        </p:txBody>
+      </p:sp>
+      <p:sp>
+        <p:nvSpPr>
+          <p:cNvPr id="65" name="TextBox 64"/>
+          <p:cNvSpPr txBox="1"/>
+          <p:nvPr/>
+        </p:nvSpPr>
+        <p:spPr>
+          <a:xfrm>
+            <a:off x="5715000" y="5093208"/>
+            <a:ext cx="685800" cy="256032"/>
+          </a:xfrm>
+          <a:prstGeom prst="rect">
+            <a:avLst/>
+          </a:prstGeom>
+          <a:noFill/>
+        </p:spPr>
+        <p:txBody>
+          <a:bodyPr wrap="square" lIns="0" rIns="0" tIns="0" bIns="0" anchor="t">
+            <a:spAutoFit/>
+          </a:bodyPr>
+          <a:lstStyle/>
+          <a:p>
+            <a:pPr algn="r"/>
+            <a:r>
+              <a:rPr sz="1000" b="0">
+                <a:solidFill>
+                  <a:srgbClr val="1A1A1A"/>
+                </a:solidFill>
+                <a:latin typeface="Calibri"/>
+              </a:rPr>
+              <a:t>—</a:t>
+            </a:r>
+          </a:p>
+        </p:txBody>
+      </p:sp>
+      <p:sp>
+        <p:nvSpPr>
+          <p:cNvPr id="66" name="Rectangle 65"/>
           <p:cNvSpPr/>
           <p:nvPr/>
         </p:nvSpPr>
@@ -11339,7 +11549,7 @@
       </p:sp>
       <p:sp>
         <p:nvSpPr>
-          <p:cNvPr id="61" name="TextBox 60"/>
+          <p:cNvPr id="67" name="TextBox 66"/>
           <p:cNvSpPr txBox="1"/>
           <p:nvPr/>
         </p:nvSpPr>
@@ -11374,7 +11584,7 @@
       </p:sp>
       <p:sp>
         <p:nvSpPr>
-          <p:cNvPr id="62" name="Rectangle 61"/>
+          <p:cNvPr id="68" name="Rectangle 67"/>
           <p:cNvSpPr/>
           <p:nvPr/>
         </p:nvSpPr>
@@ -11420,7 +11630,7 @@
       </p:sp>
       <p:sp>
         <p:nvSpPr>
-          <p:cNvPr id="63" name="Rectangle 62"/>
+          <p:cNvPr id="69" name="Rectangle 68"/>
           <p:cNvSpPr/>
           <p:nvPr/>
         </p:nvSpPr>
@@ -11464,7 +11674,7 @@
       </p:sp>
       <p:sp>
         <p:nvSpPr>
-          <p:cNvPr id="64" name="TextBox 63"/>
+          <p:cNvPr id="70" name="TextBox 69"/>
           <p:cNvSpPr txBox="1"/>
           <p:nvPr/>
         </p:nvSpPr>
@@ -11499,7 +11709,7 @@
       </p:sp>
       <p:sp>
         <p:nvSpPr>
-          <p:cNvPr id="65" name="Rectangle 64"/>
+          <p:cNvPr id="71" name="Rectangle 70"/>
           <p:cNvSpPr/>
           <p:nvPr/>
         </p:nvSpPr>
@@ -11542,7 +11752,7 @@
       </p:sp>
       <p:sp>
         <p:nvSpPr>
-          <p:cNvPr id="66" name="Rectangle 65"/>
+          <p:cNvPr id="72" name="Rectangle 71"/>
           <p:cNvSpPr/>
           <p:nvPr/>
         </p:nvSpPr>
@@ -11555,7 +11765,7 @@
             <a:avLst/>
           </a:prstGeom>
           <a:solidFill>
-            <a:srgbClr val="B83227"/>
+            <a:srgbClr val="A28860"/>
           </a:solidFill>
           <a:ln>
             <a:noFill/>
@@ -11585,7 +11795,7 @@
       </p:sp>
       <p:sp>
         <p:nvSpPr>
-          <p:cNvPr id="67" name="TextBox 66"/>
+          <p:cNvPr id="73" name="TextBox 72"/>
           <p:cNvSpPr txBox="1"/>
           <p:nvPr/>
         </p:nvSpPr>
@@ -11613,14 +11823,14 @@
                 </a:solidFill>
                 <a:latin typeface="Calibri"/>
               </a:rPr>
-              <a:t>Buy 66%   Hold 0%   Sell 33%</a:t>
-            </a:r>
-          </a:p>
-        </p:txBody>
-      </p:sp>
-      <p:sp>
-        <p:nvSpPr>
-          <p:cNvPr id="68" name="TextBox 67"/>
+              <a:t>Buy 66%   Hold 33%   Sell 0%</a:t>
+            </a:r>
+          </a:p>
+        </p:txBody>
+      </p:sp>
+      <p:sp>
+        <p:nvSpPr>
+          <p:cNvPr id="74" name="TextBox 73"/>
           <p:cNvSpPr txBox="1"/>
           <p:nvPr/>
         </p:nvSpPr>
@@ -11655,7 +11865,7 @@
       </p:sp>
       <p:sp>
         <p:nvSpPr>
-          <p:cNvPr id="69" name="Rectangle 68"/>
+          <p:cNvPr id="75" name="Rectangle 74"/>
           <p:cNvSpPr/>
           <p:nvPr/>
         </p:nvSpPr>
@@ -11701,7 +11911,7 @@
       </p:sp>
       <p:sp>
         <p:nvSpPr>
-          <p:cNvPr id="70" name="Rectangle 69"/>
+          <p:cNvPr id="76" name="Rectangle 75"/>
           <p:cNvSpPr/>
           <p:nvPr/>
         </p:nvSpPr>
@@ -11745,7 +11955,7 @@
       </p:sp>
       <p:sp>
         <p:nvSpPr>
-          <p:cNvPr id="71" name="TextBox 70"/>
+          <p:cNvPr id="77" name="TextBox 76"/>
           <p:cNvSpPr txBox="1"/>
           <p:nvPr/>
         </p:nvSpPr>
@@ -11780,7 +11990,7 @@
       </p:sp>
       <p:sp>
         <p:nvSpPr>
-          <p:cNvPr id="72" name="TextBox 71"/>
+          <p:cNvPr id="78" name="TextBox 77"/>
           <p:cNvSpPr txBox="1"/>
           <p:nvPr/>
         </p:nvSpPr>
@@ -11815,7 +12025,7 @@
       </p:sp>
       <p:sp>
         <p:nvSpPr>
-          <p:cNvPr id="73" name="TextBox 72"/>
+          <p:cNvPr id="79" name="TextBox 78"/>
           <p:cNvSpPr txBox="1"/>
           <p:nvPr/>
         </p:nvSpPr>
@@ -11850,7 +12060,7 @@
       </p:sp>
       <p:sp>
         <p:nvSpPr>
-          <p:cNvPr id="74" name="TextBox 73"/>
+          <p:cNvPr id="80" name="TextBox 79"/>
           <p:cNvSpPr txBox="1"/>
           <p:nvPr/>
         </p:nvSpPr>
@@ -11885,7 +12095,7 @@
       </p:sp>
       <p:sp>
         <p:nvSpPr>
-          <p:cNvPr id="75" name="Rectangle 74"/>
+          <p:cNvPr id="81" name="Rectangle 80"/>
           <p:cNvSpPr/>
           <p:nvPr/>
         </p:nvSpPr>
@@ -11931,7 +12141,7 @@
       </p:sp>
       <p:sp>
         <p:nvSpPr>
-          <p:cNvPr id="76" name="Rectangle 75"/>
+          <p:cNvPr id="82" name="Rectangle 81"/>
           <p:cNvSpPr/>
           <p:nvPr/>
         </p:nvSpPr>
@@ -11975,7 +12185,7 @@
       </p:sp>
       <p:sp>
         <p:nvSpPr>
-          <p:cNvPr id="77" name="TextBox 76"/>
+          <p:cNvPr id="83" name="TextBox 82"/>
           <p:cNvSpPr txBox="1"/>
           <p:nvPr/>
         </p:nvSpPr>
@@ -12010,7 +12220,7 @@
       </p:sp>
       <p:sp>
         <p:nvSpPr>
-          <p:cNvPr id="78" name="TextBox 77"/>
+          <p:cNvPr id="84" name="TextBox 83"/>
           <p:cNvSpPr txBox="1"/>
           <p:nvPr/>
         </p:nvSpPr>
@@ -12045,7 +12255,7 @@
       </p:sp>
       <p:sp>
         <p:nvSpPr>
-          <p:cNvPr id="79" name="Rectangle 78"/>
+          <p:cNvPr id="85" name="Rectangle 84"/>
           <p:cNvSpPr/>
           <p:nvPr/>
         </p:nvSpPr>
@@ -12089,7 +12299,7 @@
       </p:sp>
       <p:sp>
         <p:nvSpPr>
-          <p:cNvPr id="80" name="TextBox 79"/>
+          <p:cNvPr id="86" name="TextBox 85"/>
           <p:cNvSpPr txBox="1"/>
           <p:nvPr/>
         </p:nvSpPr>
@@ -12117,14 +12327,14 @@
                 </a:solidFill>
                 <a:latin typeface="Calibri"/>
               </a:rPr>
-              <a:t>Source: investing, marketscreener  |  Generated 13 May 2026  |  Analyst: Jabal Research</a:t>
-            </a:r>
-          </a:p>
-        </p:txBody>
-      </p:sp>
-      <p:sp>
-        <p:nvSpPr>
-          <p:cNvPr id="81" name="TextBox 80"/>
+              <a:t>Source: investing, ishares, marketscreener  |  Generated 13 May 2026  |  Analyst: Jabal Research</a:t>
+            </a:r>
+          </a:p>
+        </p:txBody>
+      </p:sp>
+      <p:sp>
+        <p:nvSpPr>
+          <p:cNvPr id="87" name="TextBox 86"/>
           <p:cNvSpPr txBox="1"/>
           <p:nvPr/>
         </p:nvSpPr>
@@ -12159,7 +12369,7 @@
       </p:sp>
       <p:sp>
         <p:nvSpPr>
-          <p:cNvPr id="82" name="TextBox 81"/>
+          <p:cNvPr id="88" name="TextBox 87"/>
           <p:cNvSpPr txBox="1"/>
           <p:nvPr/>
         </p:nvSpPr>
@@ -12194,7 +12404,7 @@
       </p:sp>
       <p:sp>
         <p:nvSpPr>
-          <p:cNvPr id="83" name="TextBox 82"/>
+          <p:cNvPr id="89" name="TextBox 88"/>
           <p:cNvSpPr txBox="1"/>
           <p:nvPr/>
         </p:nvSpPr>

--- a/static/decks/BKMB.OM.pptx
+++ b/static/decks/BKMB.OM.pptx
@@ -11393,7 +11393,7 @@
                 </a:solidFill>
                 <a:latin typeface="Calibri"/>
               </a:rPr>
-              <a:t>—</a:t>
+              <a:t>$24.9B</a:t>
             </a:r>
           </a:p>
         </p:txBody>
@@ -11463,7 +11463,7 @@
                 </a:solidFill>
                 <a:latin typeface="Calibri"/>
               </a:rPr>
-              <a:t>—</a:t>
+              <a:t>+33.3% YTD</a:t>
             </a:r>
           </a:p>
         </p:txBody>
@@ -11494,11 +11494,11 @@
             <a:r>
               <a:rPr sz="1000" b="0">
                 <a:solidFill>
-                  <a:srgbClr val="1A1A1A"/>
-                </a:solidFill>
-                <a:latin typeface="Calibri"/>
-              </a:rPr>
-              <a:t>—</a:t>
+                  <a:srgbClr val="2F7D4F"/>
+                </a:solidFill>
+                <a:latin typeface="Calibri"/>
+              </a:rPr>
+              <a:t>+31.9%</a:t>
             </a:r>
           </a:p>
         </p:txBody>

--- a/static/decks/BKMB.OM.pptx
+++ b/static/decks/BKMB.OM.pptx
@@ -6002,7 +6002,7 @@
                 </a:solidFill>
                 <a:latin typeface="Calibri"/>
               </a:rPr>
-              <a:t>Source: investing, ishares, marketscreener  |  Generated 13 May 2026  |  Analyst: Jabal Research</a:t>
+              <a:t>Source: investing, ishares, marketscreener  |  Generated 14 May 2026  |  Analyst: Jabal Research</a:t>
             </a:r>
           </a:p>
         </p:txBody>
@@ -8963,7 +8963,7 @@
                 </a:solidFill>
                 <a:latin typeface="Calibri"/>
               </a:rPr>
-              <a:t>Source: investing, ishares, marketscreener  |  Generated 13 May 2026  |  Analyst: Jabal Research</a:t>
+              <a:t>Source: investing, ishares, marketscreener  |  Generated 14 May 2026  |  Analyst: Jabal Research</a:t>
             </a:r>
           </a:p>
         </p:txBody>
@@ -12327,7 +12327,7 @@
                 </a:solidFill>
                 <a:latin typeface="Calibri"/>
               </a:rPr>
-              <a:t>Source: investing, ishares, marketscreener  |  Generated 13 May 2026  |  Analyst: Jabal Research</a:t>
+              <a:t>Source: investing, ishares, marketscreener  |  Generated 14 May 2026  |  Analyst: Jabal Research</a:t>
             </a:r>
           </a:p>
         </p:txBody>

--- a/static/decks/BKMB.OM.pptx
+++ b/static/decks/BKMB.OM.pptx
@@ -3374,7 +3374,7 @@
                 </a:solidFill>
                 <a:latin typeface="Calibri"/>
               </a:rPr>
-              <a:t>BKMB.OM  ·  Financials  ·  Banks  ·  —</a:t>
+              <a:t>BKMB.OM  ·  Financials  ·  Banks  ·  MSX (Oman)</a:t>
             </a:r>
           </a:p>
         </p:txBody>
@@ -3968,7 +3968,7 @@
                 </a:solidFill>
                 <a:latin typeface="Calibri"/>
               </a:rPr>
-              <a:t>+4.9%</a:t>
+              <a:t>+14.7%</a:t>
             </a:r>
           </a:p>
         </p:txBody>
@@ -4117,7 +4117,7 @@
                 </a:solidFill>
                 <a:latin typeface="Calibri"/>
               </a:rPr>
-              <a:t>OMR 0.45</a:t>
+              <a:t>OMR 0.41</a:t>
             </a:r>
           </a:p>
         </p:txBody>
@@ -4187,7 +4187,7 @@
                 </a:solidFill>
                 <a:latin typeface="Calibri"/>
               </a:rPr>
-              <a:t>OMR 3.4B</a:t>
+              <a:t>OMR 3.1B</a:t>
             </a:r>
           </a:p>
         </p:txBody>
@@ -4292,7 +4292,7 @@
                 </a:solidFill>
                 <a:latin typeface="Calibri"/>
               </a:rPr>
-              <a:t>P/E (FY EST)</a:t>
+              <a:t>P/E (FY26E)</a:t>
             </a:r>
           </a:p>
         </p:txBody>
@@ -4327,7 +4327,7 @@
                 </a:solidFill>
                 <a:latin typeface="Calibri"/>
               </a:rPr>
-              <a:t>12.3x</a:t>
+              <a:t>12.4x</a:t>
             </a:r>
           </a:p>
         </p:txBody>
@@ -4397,7 +4397,7 @@
                 </a:solidFill>
                 <a:latin typeface="Calibri"/>
               </a:rPr>
-              <a:t>4.79%</a:t>
+              <a:t>4.83%</a:t>
             </a:r>
           </a:p>
         </p:txBody>
@@ -5080,7 +5080,7 @@
                 </a:solidFill>
                 <a:latin typeface="Calibri"/>
               </a:rPr>
-              <a:t>OMR 0.41</a:t>
+              <a:t>OMR 0.37</a:t>
             </a:r>
           </a:p>
         </p:txBody>
@@ -5115,7 +5115,7 @@
                 </a:solidFill>
                 <a:latin typeface="Calibri"/>
               </a:rPr>
-              <a:t>OMR 0.50</a:t>
+              <a:t>OMR 0.46</a:t>
             </a:r>
           </a:p>
         </p:txBody>
@@ -5279,7 +5279,7 @@
                 </a:solidFill>
                 <a:latin typeface="Calibri"/>
               </a:rPr>
-              <a:t>Current  OMR 0.45</a:t>
+              <a:t>Current  OMR 0.41</a:t>
             </a:r>
           </a:p>
         </p:txBody>
@@ -5471,7 +5471,7 @@
                 </a:solidFill>
                 <a:latin typeface="Calibri"/>
               </a:rPr>
-              <a:t>Awaiting next print; consensus updates trickling in.</a:t>
+              <a:t>Consensus Buy from 3 analysts covering.</a:t>
             </a:r>
           </a:p>
         </p:txBody>
@@ -5584,7 +5584,7 @@
                 </a:solidFill>
                 <a:latin typeface="Calibri"/>
               </a:rPr>
-              <a:t>Multiple sits in mid-range vs. 5-year history.</a:t>
+              <a:t>Forward P/E 12.4x — anchor for re-rate / de-rate debate.</a:t>
             </a:r>
           </a:p>
         </p:txBody>
@@ -5697,7 +5697,7 @@
                 </a:solidFill>
                 <a:latin typeface="Calibri"/>
               </a:rPr>
-              <a:t>Dividend yield in line with sector peers.</a:t>
+              <a:t>Dividend yield 4.83% supports income mandate fit.</a:t>
             </a:r>
           </a:p>
         </p:txBody>
@@ -5810,7 +5810,7 @@
                 </a:solidFill>
                 <a:latin typeface="Calibri"/>
               </a:rPr>
-              <a:t>Management commentary on forward demand is key.</a:t>
+              <a:t>Target OMR 0.47 (+14.7% vs last close).</a:t>
             </a:r>
           </a:p>
         </p:txBody>
@@ -5923,7 +5923,7 @@
                 </a:solidFill>
                 <a:latin typeface="Calibri"/>
               </a:rPr>
-              <a:t>Macro and feedstock-cost volatility remain top risks.</a:t>
+              <a:t>Rating mix 2/1/0 (buy/hold/sell) — view dispersion.</a:t>
             </a:r>
           </a:p>
         </p:txBody>
@@ -6002,7 +6002,7 @@
                 </a:solidFill>
                 <a:latin typeface="Calibri"/>
               </a:rPr>
-              <a:t>Source: investing, ishares, marketscreener  |  Generated 14 May 2026  |  Analyst: Jabal Research</a:t>
+              <a:t>Source: Investing.com, MarketScreener, World Bank / IMF, iShares  |  Generated 17 May 2026  |  Analyst: Jabal Research</a:t>
             </a:r>
           </a:p>
         </p:txBody>
@@ -6548,7 +6548,7 @@
                 </a:solidFill>
                 <a:latin typeface="Calibri"/>
               </a:rPr>
-              <a:t>Jabal maintains a constructive view into the upcoming print. Bank Muscat sits in the Financials sector (Banks). Street consensus is buy (3 analysts covering); consensus target 0.47. The shares trade at a P/E around 12.3x trailing earnings. Macro context: local-economy GDP growth recently at 1.6%. The thesis hinges on three factors: demand trajectory through H2, feedstock/input-cost discipline, and management's tone on guidance during the call. We expect the print itself to be within consensus bounds; the read on forward commentary is the swing factor.</a:t>
+              <a:t>Jabal maintains a constructive view into the upcoming print. Bank Muscat sits in the Financials sector (Banks). Street consensus is Buy (3 analysts covering); consensus target 0.47. The shares trade at a P/E around 11.3x trailing earnings. Macro context: local-economy GDP growth recently at 1.6%. The thesis hinges on three factors: demand trajectory through H2, feedstock/input-cost discipline, and management's tone on guidance during the call. We expect the print itself to be within consensus bounds; the read on forward commentary is the swing factor.</a:t>
             </a:r>
           </a:p>
         </p:txBody>
@@ -6662,7 +6662,7 @@
                 </a:solidFill>
                 <a:latin typeface="Calibri"/>
               </a:rPr>
-              <a:t>Jabal estimates vs. consensus  ·  Local currency unless stated</a:t>
+              <a:t>Jabal estimates vs. consensus  ·  OMR units unless stated</a:t>
             </a:r>
           </a:p>
         </p:txBody>
@@ -6676,7 +6676,7 @@
         <p:spPr>
           <a:xfrm>
             <a:off x="411480" y="4096512"/>
-            <a:ext cx="2148840" cy="274320"/>
+            <a:ext cx="1965960" cy="274320"/>
           </a:xfrm>
           <a:prstGeom prst="rect">
             <a:avLst/>
@@ -6710,7 +6710,7 @@
         </p:nvSpPr>
         <p:spPr>
           <a:xfrm>
-            <a:off x="2606040" y="4096512"/>
+            <a:off x="2423160" y="4096512"/>
             <a:ext cx="960120" cy="274320"/>
           </a:xfrm>
           <a:prstGeom prst="rect">
@@ -6732,7 +6732,7 @@
                 </a:solidFill>
                 <a:latin typeface="Calibri"/>
               </a:rPr>
-              <a:t>JABAL EST.</a:t>
+              <a:t>Q2 2026E</a:t>
             </a:r>
           </a:p>
         </p:txBody>
@@ -6745,8 +6745,8 @@
         </p:nvSpPr>
         <p:spPr>
           <a:xfrm>
-            <a:off x="3611880" y="4096512"/>
-            <a:ext cx="960120" cy="274320"/>
+            <a:off x="3429000" y="4096512"/>
+            <a:ext cx="868680" cy="274320"/>
           </a:xfrm>
           <a:prstGeom prst="rect">
             <a:avLst/>
@@ -6767,77 +6767,77 @@
                 </a:solidFill>
                 <a:latin typeface="Calibri"/>
               </a:rPr>
+              <a:t>YOY</a:t>
+            </a:r>
+          </a:p>
+        </p:txBody>
+      </p:sp>
+      <p:sp>
+        <p:nvSpPr>
+          <p:cNvPr id="19" name="TextBox 18"/>
+          <p:cNvSpPr txBox="1"/>
+          <p:nvPr/>
+        </p:nvSpPr>
+        <p:spPr>
+          <a:xfrm>
+            <a:off x="4343400" y="4096512"/>
+            <a:ext cx="868680" cy="274320"/>
+          </a:xfrm>
+          <a:prstGeom prst="rect">
+            <a:avLst/>
+          </a:prstGeom>
+          <a:noFill/>
+        </p:spPr>
+        <p:txBody>
+          <a:bodyPr wrap="square" lIns="0" rIns="0" tIns="0" bIns="0" anchor="t">
+            <a:spAutoFit/>
+          </a:bodyPr>
+          <a:lstStyle/>
+          <a:p>
+            <a:pPr algn="r"/>
+            <a:r>
+              <a:rPr sz="850" b="0">
+                <a:solidFill>
+                  <a:srgbClr val="9A9A9A"/>
+                </a:solidFill>
+                <a:latin typeface="Calibri"/>
+              </a:rPr>
+              <a:t>QOQ</a:t>
+            </a:r>
+          </a:p>
+        </p:txBody>
+      </p:sp>
+      <p:sp>
+        <p:nvSpPr>
+          <p:cNvPr id="20" name="TextBox 19"/>
+          <p:cNvSpPr txBox="1"/>
+          <p:nvPr/>
+        </p:nvSpPr>
+        <p:spPr>
+          <a:xfrm>
+            <a:off x="5257800" y="4096512"/>
+            <a:ext cx="1143000" cy="274320"/>
+          </a:xfrm>
+          <a:prstGeom prst="rect">
+            <a:avLst/>
+          </a:prstGeom>
+          <a:noFill/>
+        </p:spPr>
+        <p:txBody>
+          <a:bodyPr wrap="square" lIns="0" rIns="0" tIns="0" bIns="0" anchor="t">
+            <a:spAutoFit/>
+          </a:bodyPr>
+          <a:lstStyle/>
+          <a:p>
+            <a:pPr algn="r"/>
+            <a:r>
+              <a:rPr sz="850" b="0">
+                <a:solidFill>
+                  <a:srgbClr val="9A9A9A"/>
+                </a:solidFill>
+                <a:latin typeface="Calibri"/>
+              </a:rPr>
               <a:t>CONSENSUS</a:t>
-            </a:r>
-          </a:p>
-        </p:txBody>
-      </p:sp>
-      <p:sp>
-        <p:nvSpPr>
-          <p:cNvPr id="19" name="TextBox 18"/>
-          <p:cNvSpPr txBox="1"/>
-          <p:nvPr/>
-        </p:nvSpPr>
-        <p:spPr>
-          <a:xfrm>
-            <a:off x="4617720" y="4096512"/>
-            <a:ext cx="960120" cy="274320"/>
-          </a:xfrm>
-          <a:prstGeom prst="rect">
-            <a:avLst/>
-          </a:prstGeom>
-          <a:noFill/>
-        </p:spPr>
-        <p:txBody>
-          <a:bodyPr wrap="square" lIns="0" rIns="0" tIns="0" bIns="0" anchor="t">
-            <a:spAutoFit/>
-          </a:bodyPr>
-          <a:lstStyle/>
-          <a:p>
-            <a:pPr algn="r"/>
-            <a:r>
-              <a:rPr sz="850" b="0">
-                <a:solidFill>
-                  <a:srgbClr val="9A9A9A"/>
-                </a:solidFill>
-                <a:latin typeface="Calibri"/>
-              </a:rPr>
-              <a:t>Δ VS CONSENSUS</a:t>
-            </a:r>
-          </a:p>
-        </p:txBody>
-      </p:sp>
-      <p:sp>
-        <p:nvSpPr>
-          <p:cNvPr id="20" name="TextBox 19"/>
-          <p:cNvSpPr txBox="1"/>
-          <p:nvPr/>
-        </p:nvSpPr>
-        <p:spPr>
-          <a:xfrm>
-            <a:off x="5623560" y="4096512"/>
-            <a:ext cx="777240" cy="274320"/>
-          </a:xfrm>
-          <a:prstGeom prst="rect">
-            <a:avLst/>
-          </a:prstGeom>
-          <a:noFill/>
-        </p:spPr>
-        <p:txBody>
-          <a:bodyPr wrap="square" lIns="0" rIns="0" tIns="0" bIns="0" anchor="t">
-            <a:spAutoFit/>
-          </a:bodyPr>
-          <a:lstStyle/>
-          <a:p>
-            <a:pPr algn="r"/>
-            <a:r>
-              <a:rPr sz="850" b="0">
-                <a:solidFill>
-                  <a:srgbClr val="9A9A9A"/>
-                </a:solidFill>
-                <a:latin typeface="Calibri"/>
-              </a:rPr>
-              <a:t>YOY</a:t>
             </a:r>
           </a:p>
         </p:txBody>
@@ -6895,7 +6895,7 @@
         <p:spPr>
           <a:xfrm>
             <a:off x="411480" y="4370832"/>
-            <a:ext cx="2148840" cy="274320"/>
+            <a:ext cx="1965960" cy="274320"/>
           </a:xfrm>
           <a:prstGeom prst="rect">
             <a:avLst/>
@@ -6916,7 +6916,7 @@
                 </a:solidFill>
                 <a:latin typeface="Calibri"/>
               </a:rPr>
-              <a:t>EPS — Next Q</a:t>
+              <a:t>Operating Income (OMR)</a:t>
             </a:r>
           </a:p>
         </p:txBody>
@@ -6929,7 +6929,7 @@
         </p:nvSpPr>
         <p:spPr>
           <a:xfrm>
-            <a:off x="2606040" y="4370832"/>
+            <a:off x="2423160" y="4370832"/>
             <a:ext cx="960120" cy="274320"/>
           </a:xfrm>
           <a:prstGeom prst="rect">
@@ -6964,8 +6964,8 @@
         </p:nvSpPr>
         <p:spPr>
           <a:xfrm>
-            <a:off x="3611880" y="4370832"/>
-            <a:ext cx="960120" cy="274320"/>
+            <a:off x="3429000" y="4370832"/>
+            <a:ext cx="868680" cy="274320"/>
           </a:xfrm>
           <a:prstGeom prst="rect">
             <a:avLst/>
@@ -6999,8 +6999,8 @@
         </p:nvSpPr>
         <p:spPr>
           <a:xfrm>
-            <a:off x="4617720" y="4370832"/>
-            <a:ext cx="960120" cy="274320"/>
+            <a:off x="4343400" y="4370832"/>
+            <a:ext cx="868680" cy="274320"/>
           </a:xfrm>
           <a:prstGeom prst="rect">
             <a:avLst/>
@@ -7034,8 +7034,8 @@
         </p:nvSpPr>
         <p:spPr>
           <a:xfrm>
-            <a:off x="5623560" y="4370832"/>
-            <a:ext cx="777240" cy="274320"/>
+            <a:off x="5257800" y="4370832"/>
+            <a:ext cx="1143000" cy="274320"/>
           </a:xfrm>
           <a:prstGeom prst="rect">
             <a:avLst/>
@@ -7113,7 +7113,7 @@
         <p:spPr>
           <a:xfrm>
             <a:off x="411480" y="4645152"/>
-            <a:ext cx="2148840" cy="274320"/>
+            <a:ext cx="1965960" cy="274320"/>
           </a:xfrm>
           <a:prstGeom prst="rect">
             <a:avLst/>
@@ -7134,7 +7134,7 @@
                 </a:solidFill>
                 <a:latin typeface="Calibri"/>
               </a:rPr>
-              <a:t>Revenue — Next Q</a:t>
+              <a:t>Net Income (OMR)</a:t>
             </a:r>
           </a:p>
         </p:txBody>
@@ -7147,7 +7147,7 @@
         </p:nvSpPr>
         <p:spPr>
           <a:xfrm>
-            <a:off x="2606040" y="4645152"/>
+            <a:off x="2423160" y="4645152"/>
             <a:ext cx="960120" cy="274320"/>
           </a:xfrm>
           <a:prstGeom prst="rect">
@@ -7182,7 +7182,147 @@
         </p:nvSpPr>
         <p:spPr>
           <a:xfrm>
-            <a:off x="3611880" y="4645152"/>
+            <a:off x="3429000" y="4645152"/>
+            <a:ext cx="868680" cy="274320"/>
+          </a:xfrm>
+          <a:prstGeom prst="rect">
+            <a:avLst/>
+          </a:prstGeom>
+          <a:noFill/>
+        </p:spPr>
+        <p:txBody>
+          <a:bodyPr wrap="square" lIns="0" rIns="0" tIns="0" bIns="0" anchor="t">
+            <a:spAutoFit/>
+          </a:bodyPr>
+          <a:lstStyle/>
+          <a:p>
+            <a:pPr algn="r"/>
+            <a:r>
+              <a:rPr sz="1000" b="0">
+                <a:solidFill>
+                  <a:srgbClr val="1A1A1A"/>
+                </a:solidFill>
+                <a:latin typeface="Calibri"/>
+              </a:rPr>
+              <a:t>—</a:t>
+            </a:r>
+          </a:p>
+        </p:txBody>
+      </p:sp>
+      <p:sp>
+        <p:nvSpPr>
+          <p:cNvPr id="31" name="TextBox 30"/>
+          <p:cNvSpPr txBox="1"/>
+          <p:nvPr/>
+        </p:nvSpPr>
+        <p:spPr>
+          <a:xfrm>
+            <a:off x="4343400" y="4645152"/>
+            <a:ext cx="868680" cy="274320"/>
+          </a:xfrm>
+          <a:prstGeom prst="rect">
+            <a:avLst/>
+          </a:prstGeom>
+          <a:noFill/>
+        </p:spPr>
+        <p:txBody>
+          <a:bodyPr wrap="square" lIns="0" rIns="0" tIns="0" bIns="0" anchor="t">
+            <a:spAutoFit/>
+          </a:bodyPr>
+          <a:lstStyle/>
+          <a:p>
+            <a:pPr algn="r"/>
+            <a:r>
+              <a:rPr sz="1000" b="0">
+                <a:solidFill>
+                  <a:srgbClr val="1A1A1A"/>
+                </a:solidFill>
+                <a:latin typeface="Calibri"/>
+              </a:rPr>
+              <a:t>—</a:t>
+            </a:r>
+          </a:p>
+        </p:txBody>
+      </p:sp>
+      <p:sp>
+        <p:nvSpPr>
+          <p:cNvPr id="32" name="TextBox 31"/>
+          <p:cNvSpPr txBox="1"/>
+          <p:nvPr/>
+        </p:nvSpPr>
+        <p:spPr>
+          <a:xfrm>
+            <a:off x="5257800" y="4645152"/>
+            <a:ext cx="1143000" cy="274320"/>
+          </a:xfrm>
+          <a:prstGeom prst="rect">
+            <a:avLst/>
+          </a:prstGeom>
+          <a:noFill/>
+        </p:spPr>
+        <p:txBody>
+          <a:bodyPr wrap="square" lIns="0" rIns="0" tIns="0" bIns="0" anchor="t">
+            <a:spAutoFit/>
+          </a:bodyPr>
+          <a:lstStyle/>
+          <a:p>
+            <a:pPr algn="r"/>
+            <a:r>
+              <a:rPr sz="1000" b="0">
+                <a:solidFill>
+                  <a:srgbClr val="1A1A1A"/>
+                </a:solidFill>
+                <a:latin typeface="Calibri"/>
+              </a:rPr>
+              <a:t>—</a:t>
+            </a:r>
+          </a:p>
+        </p:txBody>
+      </p:sp>
+      <p:sp>
+        <p:nvSpPr>
+          <p:cNvPr id="33" name="TextBox 32"/>
+          <p:cNvSpPr txBox="1"/>
+          <p:nvPr/>
+        </p:nvSpPr>
+        <p:spPr>
+          <a:xfrm>
+            <a:off x="411480" y="4919472"/>
+            <a:ext cx="1965960" cy="274320"/>
+          </a:xfrm>
+          <a:prstGeom prst="rect">
+            <a:avLst/>
+          </a:prstGeom>
+          <a:noFill/>
+        </p:spPr>
+        <p:txBody>
+          <a:bodyPr wrap="square" lIns="0" rIns="0" tIns="0" bIns="0" anchor="t">
+            <a:spAutoFit/>
+          </a:bodyPr>
+          <a:lstStyle/>
+          <a:p>
+            <a:pPr algn="l"/>
+            <a:r>
+              <a:rPr sz="1000" b="0">
+                <a:solidFill>
+                  <a:srgbClr val="1A1A1A"/>
+                </a:solidFill>
+                <a:latin typeface="Calibri"/>
+              </a:rPr>
+              <a:t>EPS (OMR)</a:t>
+            </a:r>
+          </a:p>
+        </p:txBody>
+      </p:sp>
+      <p:sp>
+        <p:nvSpPr>
+          <p:cNvPr id="34" name="TextBox 33"/>
+          <p:cNvSpPr txBox="1"/>
+          <p:nvPr/>
+        </p:nvSpPr>
+        <p:spPr>
+          <a:xfrm>
+            <a:off x="2423160" y="4919472"/>
             <a:ext cx="960120" cy="274320"/>
           </a:xfrm>
           <a:prstGeom prst="rect">
@@ -7211,14 +7351,14 @@
       </p:sp>
       <p:sp>
         <p:nvSpPr>
-          <p:cNvPr id="31" name="TextBox 30"/>
-          <p:cNvSpPr txBox="1"/>
-          <p:nvPr/>
-        </p:nvSpPr>
-        <p:spPr>
-          <a:xfrm>
-            <a:off x="4617720" y="4645152"/>
-            <a:ext cx="960120" cy="274320"/>
+          <p:cNvPr id="35" name="TextBox 34"/>
+          <p:cNvSpPr txBox="1"/>
+          <p:nvPr/>
+        </p:nvSpPr>
+        <p:spPr>
+          <a:xfrm>
+            <a:off x="3429000" y="4919472"/>
+            <a:ext cx="868680" cy="274320"/>
           </a:xfrm>
           <a:prstGeom prst="rect">
             <a:avLst/>
@@ -7246,14 +7386,14 @@
       </p:sp>
       <p:sp>
         <p:nvSpPr>
-          <p:cNvPr id="32" name="TextBox 31"/>
-          <p:cNvSpPr txBox="1"/>
-          <p:nvPr/>
-        </p:nvSpPr>
-        <p:spPr>
-          <a:xfrm>
-            <a:off x="5623560" y="4645152"/>
-            <a:ext cx="777240" cy="274320"/>
+          <p:cNvPr id="36" name="TextBox 35"/>
+          <p:cNvSpPr txBox="1"/>
+          <p:nvPr/>
+        </p:nvSpPr>
+        <p:spPr>
+          <a:xfrm>
+            <a:off x="4343400" y="4919472"/>
+            <a:ext cx="868680" cy="274320"/>
           </a:xfrm>
           <a:prstGeom prst="rect">
             <a:avLst/>
@@ -7281,27 +7421,27 @@
       </p:sp>
       <p:sp>
         <p:nvSpPr>
-          <p:cNvPr id="33" name="TextBox 32"/>
-          <p:cNvSpPr txBox="1"/>
-          <p:nvPr/>
-        </p:nvSpPr>
-        <p:spPr>
-          <a:xfrm>
-            <a:off x="411480" y="4919472"/>
-            <a:ext cx="2148840" cy="274320"/>
-          </a:xfrm>
-          <a:prstGeom prst="rect">
-            <a:avLst/>
-          </a:prstGeom>
-          <a:noFill/>
-        </p:spPr>
-        <p:txBody>
-          <a:bodyPr wrap="square" lIns="0" rIns="0" tIns="0" bIns="0" anchor="t">
-            <a:spAutoFit/>
-          </a:bodyPr>
-          <a:lstStyle/>
-          <a:p>
-            <a:pPr algn="l"/>
+          <p:cNvPr id="37" name="TextBox 36"/>
+          <p:cNvSpPr txBox="1"/>
+          <p:nvPr/>
+        </p:nvSpPr>
+        <p:spPr>
+          <a:xfrm>
+            <a:off x="5257800" y="4919472"/>
+            <a:ext cx="1143000" cy="274320"/>
+          </a:xfrm>
+          <a:prstGeom prst="rect">
+            <a:avLst/>
+          </a:prstGeom>
+          <a:noFill/>
+        </p:spPr>
+        <p:txBody>
+          <a:bodyPr wrap="square" lIns="0" rIns="0" tIns="0" bIns="0" anchor="t">
+            <a:spAutoFit/>
+          </a:bodyPr>
+          <a:lstStyle/>
+          <a:p>
+            <a:pPr algn="r"/>
             <a:r>
               <a:rPr sz="1000" b="0">
                 <a:solidFill>
@@ -7309,41 +7449,6 @@
                 </a:solidFill>
                 <a:latin typeface="Calibri"/>
               </a:rPr>
-              <a:t>EPS (FY est.)</a:t>
-            </a:r>
-          </a:p>
-        </p:txBody>
-      </p:sp>
-      <p:sp>
-        <p:nvSpPr>
-          <p:cNvPr id="34" name="TextBox 33"/>
-          <p:cNvSpPr txBox="1"/>
-          <p:nvPr/>
-        </p:nvSpPr>
-        <p:spPr>
-          <a:xfrm>
-            <a:off x="2606040" y="4919472"/>
-            <a:ext cx="960120" cy="274320"/>
-          </a:xfrm>
-          <a:prstGeom prst="rect">
-            <a:avLst/>
-          </a:prstGeom>
-          <a:noFill/>
-        </p:spPr>
-        <p:txBody>
-          <a:bodyPr wrap="square" lIns="0" rIns="0" tIns="0" bIns="0" anchor="t">
-            <a:spAutoFit/>
-          </a:bodyPr>
-          <a:lstStyle/>
-          <a:p>
-            <a:pPr algn="r"/>
-            <a:r>
-              <a:rPr sz="1000" b="0">
-                <a:solidFill>
-                  <a:srgbClr val="1A1A1A"/>
-                </a:solidFill>
-                <a:latin typeface="Calibri"/>
-              </a:rPr>
               <a:t>—</a:t>
             </a:r>
           </a:p>
@@ -7351,505 +7456,7 @@
       </p:sp>
       <p:sp>
         <p:nvSpPr>
-          <p:cNvPr id="35" name="TextBox 34"/>
-          <p:cNvSpPr txBox="1"/>
-          <p:nvPr/>
-        </p:nvSpPr>
-        <p:spPr>
-          <a:xfrm>
-            <a:off x="3611880" y="4919472"/>
-            <a:ext cx="960120" cy="274320"/>
-          </a:xfrm>
-          <a:prstGeom prst="rect">
-            <a:avLst/>
-          </a:prstGeom>
-          <a:noFill/>
-        </p:spPr>
-        <p:txBody>
-          <a:bodyPr wrap="square" lIns="0" rIns="0" tIns="0" bIns="0" anchor="t">
-            <a:spAutoFit/>
-          </a:bodyPr>
-          <a:lstStyle/>
-          <a:p>
-            <a:pPr algn="r"/>
-            <a:r>
-              <a:rPr sz="1000" b="0">
-                <a:solidFill>
-                  <a:srgbClr val="1A1A1A"/>
-                </a:solidFill>
-                <a:latin typeface="Calibri"/>
-              </a:rPr>
-              <a:t>—</a:t>
-            </a:r>
-          </a:p>
-        </p:txBody>
-      </p:sp>
-      <p:sp>
-        <p:nvSpPr>
-          <p:cNvPr id="36" name="TextBox 35"/>
-          <p:cNvSpPr txBox="1"/>
-          <p:nvPr/>
-        </p:nvSpPr>
-        <p:spPr>
-          <a:xfrm>
-            <a:off x="4617720" y="4919472"/>
-            <a:ext cx="960120" cy="274320"/>
-          </a:xfrm>
-          <a:prstGeom prst="rect">
-            <a:avLst/>
-          </a:prstGeom>
-          <a:noFill/>
-        </p:spPr>
-        <p:txBody>
-          <a:bodyPr wrap="square" lIns="0" rIns="0" tIns="0" bIns="0" anchor="t">
-            <a:spAutoFit/>
-          </a:bodyPr>
-          <a:lstStyle/>
-          <a:p>
-            <a:pPr algn="r"/>
-            <a:r>
-              <a:rPr sz="1000" b="0">
-                <a:solidFill>
-                  <a:srgbClr val="1A1A1A"/>
-                </a:solidFill>
-                <a:latin typeface="Calibri"/>
-              </a:rPr>
-              <a:t>—</a:t>
-            </a:r>
-          </a:p>
-        </p:txBody>
-      </p:sp>
-      <p:sp>
-        <p:nvSpPr>
-          <p:cNvPr id="37" name="TextBox 36"/>
-          <p:cNvSpPr txBox="1"/>
-          <p:nvPr/>
-        </p:nvSpPr>
-        <p:spPr>
-          <a:xfrm>
-            <a:off x="5623560" y="4919472"/>
-            <a:ext cx="777240" cy="274320"/>
-          </a:xfrm>
-          <a:prstGeom prst="rect">
-            <a:avLst/>
-          </a:prstGeom>
-          <a:noFill/>
-        </p:spPr>
-        <p:txBody>
-          <a:bodyPr wrap="square" lIns="0" rIns="0" tIns="0" bIns="0" anchor="t">
-            <a:spAutoFit/>
-          </a:bodyPr>
-          <a:lstStyle/>
-          <a:p>
-            <a:pPr algn="r"/>
-            <a:r>
-              <a:rPr sz="1000" b="0">
-                <a:solidFill>
-                  <a:srgbClr val="1A1A1A"/>
-                </a:solidFill>
-                <a:latin typeface="Calibri"/>
-              </a:rPr>
-              <a:t>—</a:t>
-            </a:r>
-          </a:p>
-        </p:txBody>
-      </p:sp>
-      <p:sp>
-        <p:nvSpPr>
-          <p:cNvPr id="38" name="Rectangle 37"/>
-          <p:cNvSpPr/>
-          <p:nvPr/>
-        </p:nvSpPr>
-        <p:spPr>
-          <a:xfrm>
-            <a:off x="411480" y="5175504"/>
-            <a:ext cx="6035040" cy="274320"/>
-          </a:xfrm>
-          <a:prstGeom prst="rect">
-            <a:avLst/>
-          </a:prstGeom>
-          <a:solidFill>
-            <a:srgbClr val="EFE8DC"/>
-          </a:solidFill>
-          <a:ln>
-            <a:noFill/>
-          </a:ln>
-        </p:spPr>
-        <p:style>
-          <a:lnRef idx="1">
-            <a:schemeClr val="accent1"/>
-          </a:lnRef>
-          <a:fillRef idx="3">
-            <a:schemeClr val="accent1"/>
-          </a:fillRef>
-          <a:effectRef idx="2">
-            <a:schemeClr val="accent1"/>
-          </a:effectRef>
-          <a:fontRef idx="minor">
-            <a:schemeClr val="lt1"/>
-          </a:fontRef>
-        </p:style>
-        <p:txBody>
-          <a:bodyPr rtlCol="0" anchor="ctr"/>
-          <a:lstStyle/>
-          <a:p>
-            <a:pPr algn="ctr"/>
-          </a:p>
-        </p:txBody>
-      </p:sp>
-      <p:sp>
-        <p:nvSpPr>
-          <p:cNvPr id="39" name="TextBox 38"/>
-          <p:cNvSpPr txBox="1"/>
-          <p:nvPr/>
-        </p:nvSpPr>
-        <p:spPr>
-          <a:xfrm>
-            <a:off x="411480" y="5193792"/>
-            <a:ext cx="2148840" cy="274320"/>
-          </a:xfrm>
-          <a:prstGeom prst="rect">
-            <a:avLst/>
-          </a:prstGeom>
-          <a:noFill/>
-        </p:spPr>
-        <p:txBody>
-          <a:bodyPr wrap="square" lIns="0" rIns="0" tIns="0" bIns="0" anchor="t">
-            <a:spAutoFit/>
-          </a:bodyPr>
-          <a:lstStyle/>
-          <a:p>
-            <a:pPr algn="l"/>
-            <a:r>
-              <a:rPr sz="1000" b="0">
-                <a:solidFill>
-                  <a:srgbClr val="1A1A1A"/>
-                </a:solidFill>
-                <a:latin typeface="Calibri"/>
-              </a:rPr>
-              <a:t>Revenue (FY est.)</a:t>
-            </a:r>
-          </a:p>
-        </p:txBody>
-      </p:sp>
-      <p:sp>
-        <p:nvSpPr>
-          <p:cNvPr id="40" name="TextBox 39"/>
-          <p:cNvSpPr txBox="1"/>
-          <p:nvPr/>
-        </p:nvSpPr>
-        <p:spPr>
-          <a:xfrm>
-            <a:off x="2606040" y="5193792"/>
-            <a:ext cx="960120" cy="274320"/>
-          </a:xfrm>
-          <a:prstGeom prst="rect">
-            <a:avLst/>
-          </a:prstGeom>
-          <a:noFill/>
-        </p:spPr>
-        <p:txBody>
-          <a:bodyPr wrap="square" lIns="0" rIns="0" tIns="0" bIns="0" anchor="t">
-            <a:spAutoFit/>
-          </a:bodyPr>
-          <a:lstStyle/>
-          <a:p>
-            <a:pPr algn="r"/>
-            <a:r>
-              <a:rPr sz="1000" b="0">
-                <a:solidFill>
-                  <a:srgbClr val="1A1A1A"/>
-                </a:solidFill>
-                <a:latin typeface="Calibri"/>
-              </a:rPr>
-              <a:t>—</a:t>
-            </a:r>
-          </a:p>
-        </p:txBody>
-      </p:sp>
-      <p:sp>
-        <p:nvSpPr>
-          <p:cNvPr id="41" name="TextBox 40"/>
-          <p:cNvSpPr txBox="1"/>
-          <p:nvPr/>
-        </p:nvSpPr>
-        <p:spPr>
-          <a:xfrm>
-            <a:off x="3611880" y="5193792"/>
-            <a:ext cx="960120" cy="274320"/>
-          </a:xfrm>
-          <a:prstGeom prst="rect">
-            <a:avLst/>
-          </a:prstGeom>
-          <a:noFill/>
-        </p:spPr>
-        <p:txBody>
-          <a:bodyPr wrap="square" lIns="0" rIns="0" tIns="0" bIns="0" anchor="t">
-            <a:spAutoFit/>
-          </a:bodyPr>
-          <a:lstStyle/>
-          <a:p>
-            <a:pPr algn="r"/>
-            <a:r>
-              <a:rPr sz="1000" b="0">
-                <a:solidFill>
-                  <a:srgbClr val="1A1A1A"/>
-                </a:solidFill>
-                <a:latin typeface="Calibri"/>
-              </a:rPr>
-              <a:t>—</a:t>
-            </a:r>
-          </a:p>
-        </p:txBody>
-      </p:sp>
-      <p:sp>
-        <p:nvSpPr>
-          <p:cNvPr id="42" name="TextBox 41"/>
-          <p:cNvSpPr txBox="1"/>
-          <p:nvPr/>
-        </p:nvSpPr>
-        <p:spPr>
-          <a:xfrm>
-            <a:off x="4617720" y="5193792"/>
-            <a:ext cx="960120" cy="274320"/>
-          </a:xfrm>
-          <a:prstGeom prst="rect">
-            <a:avLst/>
-          </a:prstGeom>
-          <a:noFill/>
-        </p:spPr>
-        <p:txBody>
-          <a:bodyPr wrap="square" lIns="0" rIns="0" tIns="0" bIns="0" anchor="t">
-            <a:spAutoFit/>
-          </a:bodyPr>
-          <a:lstStyle/>
-          <a:p>
-            <a:pPr algn="r"/>
-            <a:r>
-              <a:rPr sz="1000" b="0">
-                <a:solidFill>
-                  <a:srgbClr val="1A1A1A"/>
-                </a:solidFill>
-                <a:latin typeface="Calibri"/>
-              </a:rPr>
-              <a:t>—</a:t>
-            </a:r>
-          </a:p>
-        </p:txBody>
-      </p:sp>
-      <p:sp>
-        <p:nvSpPr>
-          <p:cNvPr id="43" name="TextBox 42"/>
-          <p:cNvSpPr txBox="1"/>
-          <p:nvPr/>
-        </p:nvSpPr>
-        <p:spPr>
-          <a:xfrm>
-            <a:off x="5623560" y="5193792"/>
-            <a:ext cx="777240" cy="274320"/>
-          </a:xfrm>
-          <a:prstGeom prst="rect">
-            <a:avLst/>
-          </a:prstGeom>
-          <a:noFill/>
-        </p:spPr>
-        <p:txBody>
-          <a:bodyPr wrap="square" lIns="0" rIns="0" tIns="0" bIns="0" anchor="t">
-            <a:spAutoFit/>
-          </a:bodyPr>
-          <a:lstStyle/>
-          <a:p>
-            <a:pPr algn="r"/>
-            <a:r>
-              <a:rPr sz="1000" b="0">
-                <a:solidFill>
-                  <a:srgbClr val="1A1A1A"/>
-                </a:solidFill>
-                <a:latin typeface="Calibri"/>
-              </a:rPr>
-              <a:t>—</a:t>
-            </a:r>
-          </a:p>
-        </p:txBody>
-      </p:sp>
-      <p:sp>
-        <p:nvSpPr>
-          <p:cNvPr id="44" name="TextBox 43"/>
-          <p:cNvSpPr txBox="1"/>
-          <p:nvPr/>
-        </p:nvSpPr>
-        <p:spPr>
-          <a:xfrm>
-            <a:off x="411480" y="5468112"/>
-            <a:ext cx="2148840" cy="274320"/>
-          </a:xfrm>
-          <a:prstGeom prst="rect">
-            <a:avLst/>
-          </a:prstGeom>
-          <a:noFill/>
-        </p:spPr>
-        <p:txBody>
-          <a:bodyPr wrap="square" lIns="0" rIns="0" tIns="0" bIns="0" anchor="t">
-            <a:spAutoFit/>
-          </a:bodyPr>
-          <a:lstStyle/>
-          <a:p>
-            <a:pPr algn="l"/>
-            <a:r>
-              <a:rPr sz="1000" b="0">
-                <a:solidFill>
-                  <a:srgbClr val="1A1A1A"/>
-                </a:solidFill>
-                <a:latin typeface="Calibri"/>
-              </a:rPr>
-              <a:t>Dividend yield (TTM)</a:t>
-            </a:r>
-          </a:p>
-        </p:txBody>
-      </p:sp>
-      <p:sp>
-        <p:nvSpPr>
-          <p:cNvPr id="45" name="TextBox 44"/>
-          <p:cNvSpPr txBox="1"/>
-          <p:nvPr/>
-        </p:nvSpPr>
-        <p:spPr>
-          <a:xfrm>
-            <a:off x="2606040" y="5468112"/>
-            <a:ext cx="960120" cy="274320"/>
-          </a:xfrm>
-          <a:prstGeom prst="rect">
-            <a:avLst/>
-          </a:prstGeom>
-          <a:noFill/>
-        </p:spPr>
-        <p:txBody>
-          <a:bodyPr wrap="square" lIns="0" rIns="0" tIns="0" bIns="0" anchor="t">
-            <a:spAutoFit/>
-          </a:bodyPr>
-          <a:lstStyle/>
-          <a:p>
-            <a:pPr algn="r"/>
-            <a:r>
-              <a:rPr sz="1000" b="0">
-                <a:solidFill>
-                  <a:srgbClr val="1A1A1A"/>
-                </a:solidFill>
-                <a:latin typeface="Calibri"/>
-              </a:rPr>
-              <a:t>—</a:t>
-            </a:r>
-          </a:p>
-        </p:txBody>
-      </p:sp>
-      <p:sp>
-        <p:nvSpPr>
-          <p:cNvPr id="46" name="TextBox 45"/>
-          <p:cNvSpPr txBox="1"/>
-          <p:nvPr/>
-        </p:nvSpPr>
-        <p:spPr>
-          <a:xfrm>
-            <a:off x="3611880" y="5468112"/>
-            <a:ext cx="960120" cy="274320"/>
-          </a:xfrm>
-          <a:prstGeom prst="rect">
-            <a:avLst/>
-          </a:prstGeom>
-          <a:noFill/>
-        </p:spPr>
-        <p:txBody>
-          <a:bodyPr wrap="square" lIns="0" rIns="0" tIns="0" bIns="0" anchor="t">
-            <a:spAutoFit/>
-          </a:bodyPr>
-          <a:lstStyle/>
-          <a:p>
-            <a:pPr algn="r"/>
-            <a:r>
-              <a:rPr sz="1000" b="0">
-                <a:solidFill>
-                  <a:srgbClr val="1A1A1A"/>
-                </a:solidFill>
-                <a:latin typeface="Calibri"/>
-              </a:rPr>
-              <a:t>4.79%</a:t>
-            </a:r>
-          </a:p>
-        </p:txBody>
-      </p:sp>
-      <p:sp>
-        <p:nvSpPr>
-          <p:cNvPr id="47" name="TextBox 46"/>
-          <p:cNvSpPr txBox="1"/>
-          <p:nvPr/>
-        </p:nvSpPr>
-        <p:spPr>
-          <a:xfrm>
-            <a:off x="4617720" y="5468112"/>
-            <a:ext cx="960120" cy="274320"/>
-          </a:xfrm>
-          <a:prstGeom prst="rect">
-            <a:avLst/>
-          </a:prstGeom>
-          <a:noFill/>
-        </p:spPr>
-        <p:txBody>
-          <a:bodyPr wrap="square" lIns="0" rIns="0" tIns="0" bIns="0" anchor="t">
-            <a:spAutoFit/>
-          </a:bodyPr>
-          <a:lstStyle/>
-          <a:p>
-            <a:pPr algn="r"/>
-            <a:r>
-              <a:rPr sz="1000" b="0">
-                <a:solidFill>
-                  <a:srgbClr val="1A1A1A"/>
-                </a:solidFill>
-                <a:latin typeface="Calibri"/>
-              </a:rPr>
-              <a:t>—</a:t>
-            </a:r>
-          </a:p>
-        </p:txBody>
-      </p:sp>
-      <p:sp>
-        <p:nvSpPr>
-          <p:cNvPr id="48" name="TextBox 47"/>
-          <p:cNvSpPr txBox="1"/>
-          <p:nvPr/>
-        </p:nvSpPr>
-        <p:spPr>
-          <a:xfrm>
-            <a:off x="5623560" y="5468112"/>
-            <a:ext cx="777240" cy="274320"/>
-          </a:xfrm>
-          <a:prstGeom prst="rect">
-            <a:avLst/>
-          </a:prstGeom>
-          <a:noFill/>
-        </p:spPr>
-        <p:txBody>
-          <a:bodyPr wrap="square" lIns="0" rIns="0" tIns="0" bIns="0" anchor="t">
-            <a:spAutoFit/>
-          </a:bodyPr>
-          <a:lstStyle/>
-          <a:p>
-            <a:pPr algn="r"/>
-            <a:r>
-              <a:rPr sz="1000" b="0">
-                <a:solidFill>
-                  <a:srgbClr val="1A1A1A"/>
-                </a:solidFill>
-                <a:latin typeface="Calibri"/>
-              </a:rPr>
-              <a:t>—</a:t>
-            </a:r>
-          </a:p>
-        </p:txBody>
-      </p:sp>
-      <p:sp>
-        <p:nvSpPr>
-          <p:cNvPr id="49" name="TextBox 48"/>
+          <p:cNvPr id="38" name="TextBox 37"/>
           <p:cNvSpPr txBox="1"/>
           <p:nvPr/>
         </p:nvSpPr>
@@ -7877,14 +7484,14 @@
                 </a:solidFill>
                 <a:latin typeface="Calibri"/>
               </a:rPr>
-              <a:t>Consensus: —  ·  3 analysts covering</a:t>
-            </a:r>
-          </a:p>
-        </p:txBody>
-      </p:sp>
-      <p:sp>
-        <p:nvSpPr>
-          <p:cNvPr id="50" name="Rectangle 49"/>
+              <a:t>Estimates: Jabal Research  ·  Consensus: MarketScreener (3 analysts)</a:t>
+            </a:r>
+          </a:p>
+        </p:txBody>
+      </p:sp>
+      <p:sp>
+        <p:nvSpPr>
+          <p:cNvPr id="39" name="Rectangle 38"/>
           <p:cNvSpPr/>
           <p:nvPr/>
         </p:nvSpPr>
@@ -7930,7 +7537,7 @@
       </p:sp>
       <p:sp>
         <p:nvSpPr>
-          <p:cNvPr id="51" name="Rectangle 50"/>
+          <p:cNvPr id="40" name="Rectangle 39"/>
           <p:cNvSpPr/>
           <p:nvPr/>
         </p:nvSpPr>
@@ -7974,7 +7581,7 @@
       </p:sp>
       <p:sp>
         <p:nvSpPr>
-          <p:cNvPr id="52" name="TextBox 51"/>
+          <p:cNvPr id="41" name="TextBox 40"/>
           <p:cNvSpPr txBox="1"/>
           <p:nvPr/>
         </p:nvSpPr>
@@ -8009,7 +7616,7 @@
       </p:sp>
       <p:sp>
         <p:nvSpPr>
-          <p:cNvPr id="53" name="Oval 52"/>
+          <p:cNvPr id="42" name="Oval 41"/>
           <p:cNvSpPr/>
           <p:nvPr/>
         </p:nvSpPr>
@@ -8052,7 +7659,7 @@
       </p:sp>
       <p:sp>
         <p:nvSpPr>
-          <p:cNvPr id="54" name="TextBox 53"/>
+          <p:cNvPr id="43" name="TextBox 42"/>
           <p:cNvSpPr txBox="1"/>
           <p:nvPr/>
         </p:nvSpPr>
@@ -8080,14 +7687,14 @@
                 </a:solidFill>
                 <a:latin typeface="Calibri"/>
               </a:rPr>
-              <a:t>Positive quarterly surprise consistent with prior track record</a:t>
-            </a:r>
-          </a:p>
-        </p:txBody>
-      </p:sp>
-      <p:sp>
-        <p:nvSpPr>
-          <p:cNvPr id="55" name="Oval 54"/>
+              <a:t>EPS missed consensus by 0.0% last quarter; 0 of last 4 quarters above estimates</a:t>
+            </a:r>
+          </a:p>
+        </p:txBody>
+      </p:sp>
+      <p:sp>
+        <p:nvSpPr>
+          <p:cNvPr id="44" name="Oval 43"/>
           <p:cNvSpPr/>
           <p:nvPr/>
         </p:nvSpPr>
@@ -8130,7 +7737,7 @@
       </p:sp>
       <p:sp>
         <p:nvSpPr>
-          <p:cNvPr id="56" name="TextBox 55"/>
+          <p:cNvPr id="45" name="TextBox 44"/>
           <p:cNvSpPr txBox="1"/>
           <p:nvPr/>
         </p:nvSpPr>
@@ -8165,7 +7772,7 @@
       </p:sp>
       <p:sp>
         <p:nvSpPr>
-          <p:cNvPr id="57" name="Oval 56"/>
+          <p:cNvPr id="46" name="Oval 45"/>
           <p:cNvSpPr/>
           <p:nvPr/>
         </p:nvSpPr>
@@ -8208,7 +7815,7 @@
       </p:sp>
       <p:sp>
         <p:nvSpPr>
-          <p:cNvPr id="58" name="TextBox 57"/>
+          <p:cNvPr id="47" name="TextBox 46"/>
           <p:cNvSpPr txBox="1"/>
           <p:nvPr/>
         </p:nvSpPr>
@@ -8243,7 +7850,7 @@
       </p:sp>
       <p:sp>
         <p:nvSpPr>
-          <p:cNvPr id="59" name="Rectangle 58"/>
+          <p:cNvPr id="48" name="Rectangle 47"/>
           <p:cNvSpPr/>
           <p:nvPr/>
         </p:nvSpPr>
@@ -8289,7 +7896,7 @@
       </p:sp>
       <p:sp>
         <p:nvSpPr>
-          <p:cNvPr id="60" name="Rectangle 59"/>
+          <p:cNvPr id="49" name="Rectangle 48"/>
           <p:cNvSpPr/>
           <p:nvPr/>
         </p:nvSpPr>
@@ -8333,7 +7940,7 @@
       </p:sp>
       <p:sp>
         <p:nvSpPr>
-          <p:cNvPr id="61" name="TextBox 60"/>
+          <p:cNvPr id="50" name="TextBox 49"/>
           <p:cNvSpPr txBox="1"/>
           <p:nvPr/>
         </p:nvSpPr>
@@ -8368,7 +7975,7 @@
       </p:sp>
       <p:sp>
         <p:nvSpPr>
-          <p:cNvPr id="62" name="Oval 61"/>
+          <p:cNvPr id="51" name="Oval 50"/>
           <p:cNvSpPr/>
           <p:nvPr/>
         </p:nvSpPr>
@@ -8411,7 +8018,7 @@
       </p:sp>
       <p:sp>
         <p:nvSpPr>
-          <p:cNvPr id="63" name="TextBox 62"/>
+          <p:cNvPr id="52" name="TextBox 51"/>
           <p:cNvSpPr txBox="1"/>
           <p:nvPr/>
         </p:nvSpPr>
@@ -8446,7 +8053,7 @@
       </p:sp>
       <p:sp>
         <p:nvSpPr>
-          <p:cNvPr id="64" name="Oval 63"/>
+          <p:cNvPr id="53" name="Oval 52"/>
           <p:cNvSpPr/>
           <p:nvPr/>
         </p:nvSpPr>
@@ -8489,7 +8096,7 @@
       </p:sp>
       <p:sp>
         <p:nvSpPr>
-          <p:cNvPr id="65" name="TextBox 64"/>
+          <p:cNvPr id="54" name="TextBox 53"/>
           <p:cNvSpPr txBox="1"/>
           <p:nvPr/>
         </p:nvSpPr>
@@ -8524,7 +8131,7 @@
       </p:sp>
       <p:sp>
         <p:nvSpPr>
-          <p:cNvPr id="66" name="Oval 65"/>
+          <p:cNvPr id="55" name="Oval 54"/>
           <p:cNvSpPr/>
           <p:nvPr/>
         </p:nvSpPr>
@@ -8567,7 +8174,7 @@
       </p:sp>
       <p:sp>
         <p:nvSpPr>
-          <p:cNvPr id="67" name="TextBox 66"/>
+          <p:cNvPr id="56" name="TextBox 55"/>
           <p:cNvSpPr txBox="1"/>
           <p:nvPr/>
         </p:nvSpPr>
@@ -8602,7 +8209,7 @@
       </p:sp>
       <p:sp>
         <p:nvSpPr>
-          <p:cNvPr id="68" name="Rectangle 67"/>
+          <p:cNvPr id="57" name="Rectangle 56"/>
           <p:cNvSpPr/>
           <p:nvPr/>
         </p:nvSpPr>
@@ -8646,7 +8253,7 @@
       </p:sp>
       <p:sp>
         <p:nvSpPr>
-          <p:cNvPr id="69" name="TextBox 68"/>
+          <p:cNvPr id="58" name="TextBox 57"/>
           <p:cNvSpPr txBox="1"/>
           <p:nvPr/>
         </p:nvSpPr>
@@ -8681,7 +8288,7 @@
       </p:sp>
       <p:sp>
         <p:nvSpPr>
-          <p:cNvPr id="70" name="TextBox 69"/>
+          <p:cNvPr id="59" name="TextBox 58"/>
           <p:cNvSpPr txBox="1"/>
           <p:nvPr/>
         </p:nvSpPr>
@@ -8716,7 +8323,7 @@
       </p:sp>
       <p:sp>
         <p:nvSpPr>
-          <p:cNvPr id="71" name="TextBox 70"/>
+          <p:cNvPr id="60" name="TextBox 59"/>
           <p:cNvSpPr txBox="1"/>
           <p:nvPr/>
         </p:nvSpPr>
@@ -8751,7 +8358,7 @@
       </p:sp>
       <p:sp>
         <p:nvSpPr>
-          <p:cNvPr id="72" name="TextBox 71"/>
+          <p:cNvPr id="61" name="TextBox 60"/>
           <p:cNvSpPr txBox="1"/>
           <p:nvPr/>
         </p:nvSpPr>
@@ -8786,7 +8393,7 @@
       </p:sp>
       <p:sp>
         <p:nvSpPr>
-          <p:cNvPr id="73" name="TextBox 72"/>
+          <p:cNvPr id="62" name="TextBox 61"/>
           <p:cNvSpPr txBox="1"/>
           <p:nvPr/>
         </p:nvSpPr>
@@ -8821,7 +8428,7 @@
       </p:sp>
       <p:sp>
         <p:nvSpPr>
-          <p:cNvPr id="74" name="TextBox 73"/>
+          <p:cNvPr id="63" name="TextBox 62"/>
           <p:cNvSpPr txBox="1"/>
           <p:nvPr/>
         </p:nvSpPr>
@@ -8856,7 +8463,7 @@
       </p:sp>
       <p:sp>
         <p:nvSpPr>
-          <p:cNvPr id="75" name="TextBox 74"/>
+          <p:cNvPr id="64" name="TextBox 63"/>
           <p:cNvSpPr txBox="1"/>
           <p:nvPr/>
         </p:nvSpPr>
@@ -8891,7 +8498,7 @@
       </p:sp>
       <p:sp>
         <p:nvSpPr>
-          <p:cNvPr id="76" name="Rectangle 75"/>
+          <p:cNvPr id="65" name="Rectangle 64"/>
           <p:cNvSpPr/>
           <p:nvPr/>
         </p:nvSpPr>
@@ -8935,7 +8542,7 @@
       </p:sp>
       <p:sp>
         <p:nvSpPr>
-          <p:cNvPr id="77" name="TextBox 76"/>
+          <p:cNvPr id="66" name="TextBox 65"/>
           <p:cNvSpPr txBox="1"/>
           <p:nvPr/>
         </p:nvSpPr>
@@ -8963,14 +8570,14 @@
                 </a:solidFill>
                 <a:latin typeface="Calibri"/>
               </a:rPr>
-              <a:t>Source: investing, ishares, marketscreener  |  Generated 14 May 2026  |  Analyst: Jabal Research</a:t>
-            </a:r>
-          </a:p>
-        </p:txBody>
-      </p:sp>
-      <p:sp>
-        <p:nvSpPr>
-          <p:cNvPr id="78" name="TextBox 77"/>
+              <a:t>Source: Investing.com, MarketScreener, World Bank / IMF, iShares  |  Generated 17 May 2026  |  Analyst: Jabal Research</a:t>
+            </a:r>
+          </a:p>
+        </p:txBody>
+      </p:sp>
+      <p:sp>
+        <p:nvSpPr>
+          <p:cNvPr id="67" name="TextBox 66"/>
           <p:cNvSpPr txBox="1"/>
           <p:nvPr/>
         </p:nvSpPr>
@@ -9005,7 +8612,7 @@
       </p:sp>
       <p:sp>
         <p:nvSpPr>
-          <p:cNvPr id="79" name="TextBox 78"/>
+          <p:cNvPr id="68" name="TextBox 67"/>
           <p:cNvSpPr txBox="1"/>
           <p:nvPr/>
         </p:nvSpPr>
@@ -9040,7 +8647,7 @@
       </p:sp>
       <p:sp>
         <p:nvSpPr>
-          <p:cNvPr id="80" name="TextBox 79"/>
+          <p:cNvPr id="69" name="TextBox 68"/>
           <p:cNvSpPr txBox="1"/>
           <p:nvPr/>
         </p:nvSpPr>
@@ -9524,7 +9131,7 @@
                 </a:solidFill>
                 <a:latin typeface="Calibri"/>
               </a:rPr>
-              <a:t>FY2021</a:t>
+              <a:t>FY2024</a:t>
             </a:r>
           </a:p>
         </p:txBody>
@@ -9538,7 +9145,7 @@
         <p:spPr>
           <a:xfrm>
             <a:off x="4023360" y="2121408"/>
-            <a:ext cx="594521" cy="73152"/>
+            <a:ext cx="640228" cy="73152"/>
           </a:xfrm>
           <a:prstGeom prst="rect">
             <a:avLst/>
@@ -9580,7 +9187,7 @@
         </p:nvSpPr>
         <p:spPr>
           <a:xfrm>
-            <a:off x="4572161" y="2103120"/>
+            <a:off x="4617868" y="2103120"/>
             <a:ext cx="91440" cy="109728"/>
           </a:xfrm>
           <a:prstGeom prst="ellipse">
@@ -9623,7 +9230,7 @@
         </p:nvSpPr>
         <p:spPr>
           <a:xfrm>
-            <a:off x="4663601" y="2084831"/>
+            <a:off x="4709308" y="2084831"/>
             <a:ext cx="411480" cy="182880"/>
           </a:xfrm>
           <a:prstGeom prst="rect">
@@ -9645,7 +9252,7 @@
                 </a:solidFill>
                 <a:latin typeface="Calibri"/>
               </a:rPr>
-              <a:t>9.5x</a:t>
+              <a:t>9.3x</a:t>
             </a:r>
           </a:p>
         </p:txBody>
@@ -9680,7 +9287,7 @@
                 </a:solidFill>
                 <a:latin typeface="Calibri"/>
               </a:rPr>
-              <a:t>FY2022</a:t>
+              <a:t>FY2025</a:t>
             </a:r>
           </a:p>
         </p:txBody>
@@ -9694,7 +9301,7 @@
         <p:spPr>
           <a:xfrm>
             <a:off x="4023360" y="2395727"/>
-            <a:ext cx="920245" cy="73152"/>
+            <a:ext cx="1110277" cy="73152"/>
           </a:xfrm>
           <a:prstGeom prst="rect">
             <a:avLst/>
@@ -9736,7 +9343,7 @@
         </p:nvSpPr>
         <p:spPr>
           <a:xfrm>
-            <a:off x="4897885" y="2377439"/>
+            <a:off x="5087917" y="2377439"/>
             <a:ext cx="91440" cy="109728"/>
           </a:xfrm>
           <a:prstGeom prst="ellipse">
@@ -9779,7 +9386,7 @@
         </p:nvSpPr>
         <p:spPr>
           <a:xfrm>
-            <a:off x="4989325" y="2359151"/>
+            <a:off x="5179357" y="2359151"/>
             <a:ext cx="411480" cy="182880"/>
           </a:xfrm>
           <a:prstGeom prst="rect">
@@ -9801,7 +9408,7 @@
                 </a:solidFill>
                 <a:latin typeface="Calibri"/>
               </a:rPr>
-              <a:t>10.6x</a:t>
+              <a:t>10.7x</a:t>
             </a:r>
           </a:p>
         </p:txBody>
@@ -9836,7 +9443,7 @@
                 </a:solidFill>
                 <a:latin typeface="Calibri"/>
               </a:rPr>
-              <a:t>FY2023</a:t>
+              <a:t>FY2026</a:t>
             </a:r>
           </a:p>
         </p:txBody>
@@ -9850,7 +9457,7 @@
         <p:spPr>
           <a:xfrm>
             <a:off x="4023360" y="2670048"/>
-            <a:ext cx="920245" cy="73152"/>
+            <a:ext cx="1693550" cy="73152"/>
           </a:xfrm>
           <a:prstGeom prst="rect">
             <a:avLst/>
@@ -9892,7 +9499,7 @@
         </p:nvSpPr>
         <p:spPr>
           <a:xfrm>
-            <a:off x="4897885" y="2651760"/>
+            <a:off x="5671190" y="2651760"/>
             <a:ext cx="91440" cy="109728"/>
           </a:xfrm>
           <a:prstGeom prst="ellipse">
@@ -9935,7 +9542,7 @@
         </p:nvSpPr>
         <p:spPr>
           <a:xfrm>
-            <a:off x="4989325" y="2633472"/>
+            <a:off x="5762630" y="2633472"/>
             <a:ext cx="411480" cy="182880"/>
           </a:xfrm>
           <a:prstGeom prst="rect">
@@ -9957,7 +9564,7 @@
                 </a:solidFill>
                 <a:latin typeface="Calibri"/>
               </a:rPr>
-              <a:t>10.6x</a:t>
+              <a:t>12.4x</a:t>
             </a:r>
           </a:p>
         </p:txBody>
@@ -9992,7 +9599,7 @@
                 </a:solidFill>
                 <a:latin typeface="Calibri"/>
               </a:rPr>
-              <a:t>FY2024</a:t>
+              <a:t>FY2027</a:t>
             </a:r>
           </a:p>
         </p:txBody>
@@ -10006,7 +9613,7 @@
         <p:spPr>
           <a:xfrm>
             <a:off x="4023360" y="2944368"/>
-            <a:ext cx="547569" cy="73152"/>
+            <a:ext cx="1487689" cy="73152"/>
           </a:xfrm>
           <a:prstGeom prst="rect">
             <a:avLst/>
@@ -10048,7 +9655,7 @@
         </p:nvSpPr>
         <p:spPr>
           <a:xfrm>
-            <a:off x="4525209" y="2926079"/>
+            <a:off x="5465329" y="2926079"/>
             <a:ext cx="91440" cy="109728"/>
           </a:xfrm>
           <a:prstGeom prst="ellipse">
@@ -10091,7 +9698,7 @@
         </p:nvSpPr>
         <p:spPr>
           <a:xfrm>
-            <a:off x="4616649" y="2907791"/>
+            <a:off x="5556769" y="2907791"/>
             <a:ext cx="411480" cy="182880"/>
           </a:xfrm>
           <a:prstGeom prst="rect">
@@ -10113,7 +9720,7 @@
                 </a:solidFill>
                 <a:latin typeface="Calibri"/>
               </a:rPr>
-              <a:t>9.3x</a:t>
+              <a:t>11.8x</a:t>
             </a:r>
           </a:p>
         </p:txBody>
@@ -10148,7 +9755,7 @@
                 </a:solidFill>
                 <a:latin typeface="Calibri"/>
               </a:rPr>
-              <a:t>FY2025</a:t>
+              <a:t>FY2028</a:t>
             </a:r>
           </a:p>
         </p:txBody>
@@ -10162,7 +9769,7 @@
         <p:spPr>
           <a:xfrm>
             <a:off x="4023360" y="3218688"/>
-            <a:ext cx="949590" cy="73152"/>
+            <a:ext cx="1316138" cy="73152"/>
           </a:xfrm>
           <a:prstGeom prst="rect">
             <a:avLst/>
@@ -10204,7 +9811,7 @@
         </p:nvSpPr>
         <p:spPr>
           <a:xfrm>
-            <a:off x="4927230" y="3200400"/>
+            <a:off x="5293778" y="3200400"/>
             <a:ext cx="91440" cy="109728"/>
           </a:xfrm>
           <a:prstGeom prst="ellipse">
@@ -10247,7 +9854,7 @@
         </p:nvSpPr>
         <p:spPr>
           <a:xfrm>
-            <a:off x="5018670" y="3182112"/>
+            <a:off x="5385218" y="3182112"/>
             <a:ext cx="411480" cy="182880"/>
           </a:xfrm>
           <a:prstGeom prst="rect">
@@ -10269,7 +9876,7 @@
                 </a:solidFill>
                 <a:latin typeface="Calibri"/>
               </a:rPr>
-              <a:t>10.7x</a:t>
+              <a:t>11.3x</a:t>
             </a:r>
           </a:p>
         </p:txBody>
@@ -10282,8 +9889,8 @@
         </p:nvSpPr>
         <p:spPr>
           <a:xfrm>
-            <a:off x="3520440" y="3438144"/>
-            <a:ext cx="502920" cy="182880"/>
+            <a:off x="3886200" y="3474720"/>
+            <a:ext cx="365760" cy="164592"/>
           </a:xfrm>
           <a:prstGeom prst="rect">
             <a:avLst/>
@@ -10298,599 +9905,131 @@
           <a:p>
             <a:pPr algn="l"/>
             <a:r>
-              <a:rPr sz="1000" b="0">
-                <a:solidFill>
-                  <a:srgbClr val="1A1A1A"/>
-                </a:solidFill>
-                <a:latin typeface="Calibri"/>
-              </a:rPr>
-              <a:t>FY2026</a:t>
-            </a:r>
-          </a:p>
-        </p:txBody>
-      </p:sp>
-      <p:sp>
-        <p:nvSpPr>
-          <p:cNvPr id="34" name="Rectangle 33"/>
+              <a:rPr sz="700" b="0">
+                <a:solidFill>
+                  <a:srgbClr val="9A9A9A"/>
+                </a:solidFill>
+                <a:latin typeface="Calibri"/>
+              </a:rPr>
+              <a:t>7x</a:t>
+            </a:r>
+          </a:p>
+        </p:txBody>
+      </p:sp>
+      <p:sp>
+        <p:nvSpPr>
+          <p:cNvPr id="34" name="TextBox 33"/>
+          <p:cNvSpPr txBox="1"/>
+          <p:nvPr/>
+        </p:nvSpPr>
+        <p:spPr>
+          <a:xfrm>
+            <a:off x="4663440" y="3474720"/>
+            <a:ext cx="365760" cy="164592"/>
+          </a:xfrm>
+          <a:prstGeom prst="rect">
+            <a:avLst/>
+          </a:prstGeom>
+          <a:noFill/>
+        </p:spPr>
+        <p:txBody>
+          <a:bodyPr wrap="square" lIns="0" rIns="0" tIns="0" bIns="0" anchor="t">
+            <a:spAutoFit/>
+          </a:bodyPr>
+          <a:lstStyle/>
+          <a:p>
+            <a:pPr algn="l"/>
+            <a:r>
+              <a:rPr sz="700" b="0">
+                <a:solidFill>
+                  <a:srgbClr val="9A9A9A"/>
+                </a:solidFill>
+                <a:latin typeface="Calibri"/>
+              </a:rPr>
+              <a:t>10x</a:t>
+            </a:r>
+          </a:p>
+        </p:txBody>
+      </p:sp>
+      <p:sp>
+        <p:nvSpPr>
+          <p:cNvPr id="35" name="TextBox 34"/>
+          <p:cNvSpPr txBox="1"/>
+          <p:nvPr/>
+        </p:nvSpPr>
+        <p:spPr>
+          <a:xfrm>
+            <a:off x="5440679" y="3474720"/>
+            <a:ext cx="365760" cy="164592"/>
+          </a:xfrm>
+          <a:prstGeom prst="rect">
+            <a:avLst/>
+          </a:prstGeom>
+          <a:noFill/>
+        </p:spPr>
+        <p:txBody>
+          <a:bodyPr wrap="square" lIns="0" rIns="0" tIns="0" bIns="0" anchor="t">
+            <a:spAutoFit/>
+          </a:bodyPr>
+          <a:lstStyle/>
+          <a:p>
+            <a:pPr algn="l"/>
+            <a:r>
+              <a:rPr sz="700" b="0">
+                <a:solidFill>
+                  <a:srgbClr val="9A9A9A"/>
+                </a:solidFill>
+                <a:latin typeface="Calibri"/>
+              </a:rPr>
+              <a:t>12x</a:t>
+            </a:r>
+          </a:p>
+        </p:txBody>
+      </p:sp>
+      <p:sp>
+        <p:nvSpPr>
+          <p:cNvPr id="36" name="TextBox 35"/>
+          <p:cNvSpPr txBox="1"/>
+          <p:nvPr/>
+        </p:nvSpPr>
+        <p:spPr>
+          <a:xfrm>
+            <a:off x="6217920" y="3474720"/>
+            <a:ext cx="365760" cy="164592"/>
+          </a:xfrm>
+          <a:prstGeom prst="rect">
+            <a:avLst/>
+          </a:prstGeom>
+          <a:noFill/>
+        </p:spPr>
+        <p:txBody>
+          <a:bodyPr wrap="square" lIns="0" rIns="0" tIns="0" bIns="0" anchor="t">
+            <a:spAutoFit/>
+          </a:bodyPr>
+          <a:lstStyle/>
+          <a:p>
+            <a:pPr algn="l"/>
+            <a:r>
+              <a:rPr sz="700" b="0">
+                <a:solidFill>
+                  <a:srgbClr val="9A9A9A"/>
+                </a:solidFill>
+                <a:latin typeface="Calibri"/>
+              </a:rPr>
+              <a:t>14x</a:t>
+            </a:r>
+          </a:p>
+        </p:txBody>
+      </p:sp>
+      <p:sp>
+        <p:nvSpPr>
+          <p:cNvPr id="37" name="Diamond 36"/>
           <p:cNvSpPr/>
           <p:nvPr/>
         </p:nvSpPr>
         <p:spPr>
           <a:xfrm>
-            <a:off x="4023360" y="3493008"/>
-            <a:ext cx="1741894" cy="73152"/>
-          </a:xfrm>
-          <a:prstGeom prst="rect">
-            <a:avLst/>
-          </a:prstGeom>
-          <a:solidFill>
-            <a:srgbClr val="EFE8DC"/>
-          </a:solidFill>
-          <a:ln>
-            <a:noFill/>
-          </a:ln>
-        </p:spPr>
-        <p:style>
-          <a:lnRef idx="1">
-            <a:schemeClr val="accent1"/>
-          </a:lnRef>
-          <a:fillRef idx="3">
-            <a:schemeClr val="accent1"/>
-          </a:fillRef>
-          <a:effectRef idx="2">
-            <a:schemeClr val="accent1"/>
-          </a:effectRef>
-          <a:fontRef idx="minor">
-            <a:schemeClr val="lt1"/>
-          </a:fontRef>
-        </p:style>
-        <p:txBody>
-          <a:bodyPr rtlCol="0" anchor="ctr"/>
-          <a:lstStyle/>
-          <a:p>
-            <a:pPr algn="ctr"/>
-          </a:p>
-        </p:txBody>
-      </p:sp>
-      <p:sp>
-        <p:nvSpPr>
-          <p:cNvPr id="35" name="Oval 34"/>
-          <p:cNvSpPr/>
-          <p:nvPr/>
-        </p:nvSpPr>
-        <p:spPr>
-          <a:xfrm>
-            <a:off x="5719534" y="3474720"/>
-            <a:ext cx="91440" cy="109728"/>
-          </a:xfrm>
-          <a:prstGeom prst="ellipse">
-            <a:avLst/>
-          </a:prstGeom>
-          <a:solidFill>
-            <a:srgbClr val="7E6849"/>
-          </a:solidFill>
-          <a:ln>
-            <a:noFill/>
-          </a:ln>
-        </p:spPr>
-        <p:style>
-          <a:lnRef idx="1">
-            <a:schemeClr val="accent1"/>
-          </a:lnRef>
-          <a:fillRef idx="3">
-            <a:schemeClr val="accent1"/>
-          </a:fillRef>
-          <a:effectRef idx="2">
-            <a:schemeClr val="accent1"/>
-          </a:effectRef>
-          <a:fontRef idx="minor">
-            <a:schemeClr val="lt1"/>
-          </a:fontRef>
-        </p:style>
-        <p:txBody>
-          <a:bodyPr rtlCol="0" anchor="ctr"/>
-          <a:lstStyle/>
-          <a:p>
-            <a:pPr algn="ctr"/>
-          </a:p>
-        </p:txBody>
-      </p:sp>
-      <p:sp>
-        <p:nvSpPr>
-          <p:cNvPr id="36" name="TextBox 35"/>
-          <p:cNvSpPr txBox="1"/>
-          <p:nvPr/>
-        </p:nvSpPr>
-        <p:spPr>
-          <a:xfrm>
-            <a:off x="5810974" y="3456432"/>
-            <a:ext cx="411480" cy="182880"/>
-          </a:xfrm>
-          <a:prstGeom prst="rect">
-            <a:avLst/>
-          </a:prstGeom>
-          <a:noFill/>
-        </p:spPr>
-        <p:txBody>
-          <a:bodyPr wrap="square" lIns="0" rIns="0" tIns="0" bIns="0" anchor="t">
-            <a:spAutoFit/>
-          </a:bodyPr>
-          <a:lstStyle/>
-          <a:p>
-            <a:pPr algn="l"/>
-            <a:r>
-              <a:rPr sz="1000" b="0">
-                <a:solidFill>
-                  <a:srgbClr val="1A1A1A"/>
-                </a:solidFill>
-                <a:latin typeface="Calibri"/>
-              </a:rPr>
-              <a:t>13.4x</a:t>
-            </a:r>
-          </a:p>
-        </p:txBody>
-      </p:sp>
-      <p:sp>
-        <p:nvSpPr>
-          <p:cNvPr id="37" name="TextBox 36"/>
-          <p:cNvSpPr txBox="1"/>
-          <p:nvPr/>
-        </p:nvSpPr>
-        <p:spPr>
-          <a:xfrm>
-            <a:off x="3520440" y="3712463"/>
-            <a:ext cx="502920" cy="182880"/>
-          </a:xfrm>
-          <a:prstGeom prst="rect">
-            <a:avLst/>
-          </a:prstGeom>
-          <a:noFill/>
-        </p:spPr>
-        <p:txBody>
-          <a:bodyPr wrap="square" lIns="0" rIns="0" tIns="0" bIns="0" anchor="t">
-            <a:spAutoFit/>
-          </a:bodyPr>
-          <a:lstStyle/>
-          <a:p>
-            <a:pPr algn="l"/>
-            <a:r>
-              <a:rPr sz="1000" b="0">
-                <a:solidFill>
-                  <a:srgbClr val="1A1A1A"/>
-                </a:solidFill>
-                <a:latin typeface="Calibri"/>
-              </a:rPr>
-              <a:t>FY2027</a:t>
-            </a:r>
-          </a:p>
-        </p:txBody>
-      </p:sp>
-      <p:sp>
-        <p:nvSpPr>
-          <p:cNvPr id="38" name="Rectangle 37"/>
-          <p:cNvSpPr/>
-          <p:nvPr/>
-        </p:nvSpPr>
-        <p:spPr>
-          <a:xfrm>
-            <a:off x="4023360" y="3767327"/>
-            <a:ext cx="1565826" cy="73152"/>
-          </a:xfrm>
-          <a:prstGeom prst="rect">
-            <a:avLst/>
-          </a:prstGeom>
-          <a:solidFill>
-            <a:srgbClr val="EFE8DC"/>
-          </a:solidFill>
-          <a:ln>
-            <a:noFill/>
-          </a:ln>
-        </p:spPr>
-        <p:style>
-          <a:lnRef idx="1">
-            <a:schemeClr val="accent1"/>
-          </a:lnRef>
-          <a:fillRef idx="3">
-            <a:schemeClr val="accent1"/>
-          </a:fillRef>
-          <a:effectRef idx="2">
-            <a:schemeClr val="accent1"/>
-          </a:effectRef>
-          <a:fontRef idx="minor">
-            <a:schemeClr val="lt1"/>
-          </a:fontRef>
-        </p:style>
-        <p:txBody>
-          <a:bodyPr rtlCol="0" anchor="ctr"/>
-          <a:lstStyle/>
-          <a:p>
-            <a:pPr algn="ctr"/>
-          </a:p>
-        </p:txBody>
-      </p:sp>
-      <p:sp>
-        <p:nvSpPr>
-          <p:cNvPr id="39" name="Oval 38"/>
-          <p:cNvSpPr/>
-          <p:nvPr/>
-        </p:nvSpPr>
-        <p:spPr>
-          <a:xfrm>
-            <a:off x="5543466" y="3749039"/>
-            <a:ext cx="91440" cy="109728"/>
-          </a:xfrm>
-          <a:prstGeom prst="ellipse">
-            <a:avLst/>
-          </a:prstGeom>
-          <a:solidFill>
-            <a:srgbClr val="7E6849"/>
-          </a:solidFill>
-          <a:ln>
-            <a:noFill/>
-          </a:ln>
-        </p:spPr>
-        <p:style>
-          <a:lnRef idx="1">
-            <a:schemeClr val="accent1"/>
-          </a:lnRef>
-          <a:fillRef idx="3">
-            <a:schemeClr val="accent1"/>
-          </a:fillRef>
-          <a:effectRef idx="2">
-            <a:schemeClr val="accent1"/>
-          </a:effectRef>
-          <a:fontRef idx="minor">
-            <a:schemeClr val="lt1"/>
-          </a:fontRef>
-        </p:style>
-        <p:txBody>
-          <a:bodyPr rtlCol="0" anchor="ctr"/>
-          <a:lstStyle/>
-          <a:p>
-            <a:pPr algn="ctr"/>
-          </a:p>
-        </p:txBody>
-      </p:sp>
-      <p:sp>
-        <p:nvSpPr>
-          <p:cNvPr id="40" name="TextBox 39"/>
-          <p:cNvSpPr txBox="1"/>
-          <p:nvPr/>
-        </p:nvSpPr>
-        <p:spPr>
-          <a:xfrm>
-            <a:off x="5634906" y="3730751"/>
-            <a:ext cx="411480" cy="182880"/>
-          </a:xfrm>
-          <a:prstGeom prst="rect">
-            <a:avLst/>
-          </a:prstGeom>
-          <a:noFill/>
-        </p:spPr>
-        <p:txBody>
-          <a:bodyPr wrap="square" lIns="0" rIns="0" tIns="0" bIns="0" anchor="t">
-            <a:spAutoFit/>
-          </a:bodyPr>
-          <a:lstStyle/>
-          <a:p>
-            <a:pPr algn="l"/>
-            <a:r>
-              <a:rPr sz="1000" b="0">
-                <a:solidFill>
-                  <a:srgbClr val="1A1A1A"/>
-                </a:solidFill>
-                <a:latin typeface="Calibri"/>
-              </a:rPr>
-              <a:t>12.8x</a:t>
-            </a:r>
-          </a:p>
-        </p:txBody>
-      </p:sp>
-      <p:sp>
-        <p:nvSpPr>
-          <p:cNvPr id="41" name="TextBox 40"/>
-          <p:cNvSpPr txBox="1"/>
-          <p:nvPr/>
-        </p:nvSpPr>
-        <p:spPr>
-          <a:xfrm>
-            <a:off x="3520440" y="3986783"/>
-            <a:ext cx="502920" cy="182880"/>
-          </a:xfrm>
-          <a:prstGeom prst="rect">
-            <a:avLst/>
-          </a:prstGeom>
-          <a:noFill/>
-        </p:spPr>
-        <p:txBody>
-          <a:bodyPr wrap="square" lIns="0" rIns="0" tIns="0" bIns="0" anchor="t">
-            <a:spAutoFit/>
-          </a:bodyPr>
-          <a:lstStyle/>
-          <a:p>
-            <a:pPr algn="l"/>
-            <a:r>
-              <a:rPr sz="1000" b="0">
-                <a:solidFill>
-                  <a:srgbClr val="1A1A1A"/>
-                </a:solidFill>
-                <a:latin typeface="Calibri"/>
-              </a:rPr>
-              <a:t>FY2028</a:t>
-            </a:r>
-          </a:p>
-        </p:txBody>
-      </p:sp>
-      <p:sp>
-        <p:nvSpPr>
-          <p:cNvPr id="42" name="Rectangle 41"/>
-          <p:cNvSpPr/>
-          <p:nvPr/>
-        </p:nvSpPr>
-        <p:spPr>
-          <a:xfrm>
-            <a:off x="4023360" y="4041647"/>
-            <a:ext cx="1419103" cy="73152"/>
-          </a:xfrm>
-          <a:prstGeom prst="rect">
-            <a:avLst/>
-          </a:prstGeom>
-          <a:solidFill>
-            <a:srgbClr val="EFE8DC"/>
-          </a:solidFill>
-          <a:ln>
-            <a:noFill/>
-          </a:ln>
-        </p:spPr>
-        <p:style>
-          <a:lnRef idx="1">
-            <a:schemeClr val="accent1"/>
-          </a:lnRef>
-          <a:fillRef idx="3">
-            <a:schemeClr val="accent1"/>
-          </a:fillRef>
-          <a:effectRef idx="2">
-            <a:schemeClr val="accent1"/>
-          </a:effectRef>
-          <a:fontRef idx="minor">
-            <a:schemeClr val="lt1"/>
-          </a:fontRef>
-        </p:style>
-        <p:txBody>
-          <a:bodyPr rtlCol="0" anchor="ctr"/>
-          <a:lstStyle/>
-          <a:p>
-            <a:pPr algn="ctr"/>
-          </a:p>
-        </p:txBody>
-      </p:sp>
-      <p:sp>
-        <p:nvSpPr>
-          <p:cNvPr id="43" name="Oval 42"/>
-          <p:cNvSpPr/>
-          <p:nvPr/>
-        </p:nvSpPr>
-        <p:spPr>
-          <a:xfrm>
-            <a:off x="5396743" y="4023359"/>
-            <a:ext cx="91440" cy="109728"/>
-          </a:xfrm>
-          <a:prstGeom prst="ellipse">
-            <a:avLst/>
-          </a:prstGeom>
-          <a:solidFill>
-            <a:srgbClr val="7E6849"/>
-          </a:solidFill>
-          <a:ln>
-            <a:noFill/>
-          </a:ln>
-        </p:spPr>
-        <p:style>
-          <a:lnRef idx="1">
-            <a:schemeClr val="accent1"/>
-          </a:lnRef>
-          <a:fillRef idx="3">
-            <a:schemeClr val="accent1"/>
-          </a:fillRef>
-          <a:effectRef idx="2">
-            <a:schemeClr val="accent1"/>
-          </a:effectRef>
-          <a:fontRef idx="minor">
-            <a:schemeClr val="lt1"/>
-          </a:fontRef>
-        </p:style>
-        <p:txBody>
-          <a:bodyPr rtlCol="0" anchor="ctr"/>
-          <a:lstStyle/>
-          <a:p>
-            <a:pPr algn="ctr"/>
-          </a:p>
-        </p:txBody>
-      </p:sp>
-      <p:sp>
-        <p:nvSpPr>
-          <p:cNvPr id="44" name="TextBox 43"/>
-          <p:cNvSpPr txBox="1"/>
-          <p:nvPr/>
-        </p:nvSpPr>
-        <p:spPr>
-          <a:xfrm>
-            <a:off x="5488183" y="4005071"/>
-            <a:ext cx="411480" cy="182880"/>
-          </a:xfrm>
-          <a:prstGeom prst="rect">
-            <a:avLst/>
-          </a:prstGeom>
-          <a:noFill/>
-        </p:spPr>
-        <p:txBody>
-          <a:bodyPr wrap="square" lIns="0" rIns="0" tIns="0" bIns="0" anchor="t">
-            <a:spAutoFit/>
-          </a:bodyPr>
-          <a:lstStyle/>
-          <a:p>
-            <a:pPr algn="l"/>
-            <a:r>
-              <a:rPr sz="1000" b="0">
-                <a:solidFill>
-                  <a:srgbClr val="1A1A1A"/>
-                </a:solidFill>
-                <a:latin typeface="Calibri"/>
-              </a:rPr>
-              <a:t>12.3x</a:t>
-            </a:r>
-          </a:p>
-        </p:txBody>
-      </p:sp>
-      <p:sp>
-        <p:nvSpPr>
-          <p:cNvPr id="45" name="TextBox 44"/>
-          <p:cNvSpPr txBox="1"/>
-          <p:nvPr/>
-        </p:nvSpPr>
-        <p:spPr>
-          <a:xfrm>
-            <a:off x="3886200" y="4297680"/>
-            <a:ext cx="365760" cy="164592"/>
-          </a:xfrm>
-          <a:prstGeom prst="rect">
-            <a:avLst/>
-          </a:prstGeom>
-          <a:noFill/>
-        </p:spPr>
-        <p:txBody>
-          <a:bodyPr wrap="square" lIns="0" rIns="0" tIns="0" bIns="0" anchor="t">
-            <a:spAutoFit/>
-          </a:bodyPr>
-          <a:lstStyle/>
-          <a:p>
-            <a:pPr algn="l"/>
-            <a:r>
-              <a:rPr sz="700" b="0">
-                <a:solidFill>
-                  <a:srgbClr val="9A9A9A"/>
-                </a:solidFill>
-                <a:latin typeface="Calibri"/>
-              </a:rPr>
-              <a:t>7x</a:t>
-            </a:r>
-          </a:p>
-        </p:txBody>
-      </p:sp>
-      <p:sp>
-        <p:nvSpPr>
-          <p:cNvPr id="46" name="TextBox 45"/>
-          <p:cNvSpPr txBox="1"/>
-          <p:nvPr/>
-        </p:nvSpPr>
-        <p:spPr>
-          <a:xfrm>
-            <a:off x="4663440" y="4297680"/>
-            <a:ext cx="365760" cy="164592"/>
-          </a:xfrm>
-          <a:prstGeom prst="rect">
-            <a:avLst/>
-          </a:prstGeom>
-          <a:noFill/>
-        </p:spPr>
-        <p:txBody>
-          <a:bodyPr wrap="square" lIns="0" rIns="0" tIns="0" bIns="0" anchor="t">
-            <a:spAutoFit/>
-          </a:bodyPr>
-          <a:lstStyle/>
-          <a:p>
-            <a:pPr algn="l"/>
-            <a:r>
-              <a:rPr sz="700" b="0">
-                <a:solidFill>
-                  <a:srgbClr val="9A9A9A"/>
-                </a:solidFill>
-                <a:latin typeface="Calibri"/>
-              </a:rPr>
-              <a:t>10x</a:t>
-            </a:r>
-          </a:p>
-        </p:txBody>
-      </p:sp>
-      <p:sp>
-        <p:nvSpPr>
-          <p:cNvPr id="47" name="TextBox 46"/>
-          <p:cNvSpPr txBox="1"/>
-          <p:nvPr/>
-        </p:nvSpPr>
-        <p:spPr>
-          <a:xfrm>
-            <a:off x="5440679" y="4297680"/>
-            <a:ext cx="365760" cy="164592"/>
-          </a:xfrm>
-          <a:prstGeom prst="rect">
-            <a:avLst/>
-          </a:prstGeom>
-          <a:noFill/>
-        </p:spPr>
-        <p:txBody>
-          <a:bodyPr wrap="square" lIns="0" rIns="0" tIns="0" bIns="0" anchor="t">
-            <a:spAutoFit/>
-          </a:bodyPr>
-          <a:lstStyle/>
-          <a:p>
-            <a:pPr algn="l"/>
-            <a:r>
-              <a:rPr sz="700" b="0">
-                <a:solidFill>
-                  <a:srgbClr val="9A9A9A"/>
-                </a:solidFill>
-                <a:latin typeface="Calibri"/>
-              </a:rPr>
-              <a:t>13x</a:t>
-            </a:r>
-          </a:p>
-        </p:txBody>
-      </p:sp>
-      <p:sp>
-        <p:nvSpPr>
-          <p:cNvPr id="48" name="TextBox 47"/>
-          <p:cNvSpPr txBox="1"/>
-          <p:nvPr/>
-        </p:nvSpPr>
-        <p:spPr>
-          <a:xfrm>
-            <a:off x="6217920" y="4297680"/>
-            <a:ext cx="365760" cy="164592"/>
-          </a:xfrm>
-          <a:prstGeom prst="rect">
-            <a:avLst/>
-          </a:prstGeom>
-          <a:noFill/>
-        </p:spPr>
-        <p:txBody>
-          <a:bodyPr wrap="square" lIns="0" rIns="0" tIns="0" bIns="0" anchor="t">
-            <a:spAutoFit/>
-          </a:bodyPr>
-          <a:lstStyle/>
-          <a:p>
-            <a:pPr algn="l"/>
-            <a:r>
-              <a:rPr sz="700" b="0">
-                <a:solidFill>
-                  <a:srgbClr val="9A9A9A"/>
-                </a:solidFill>
-                <a:latin typeface="Calibri"/>
-              </a:rPr>
-              <a:t>15x</a:t>
-            </a:r>
-          </a:p>
-        </p:txBody>
-      </p:sp>
-      <p:sp>
-        <p:nvSpPr>
-          <p:cNvPr id="49" name="Diamond 48"/>
-          <p:cNvSpPr/>
-          <p:nvPr/>
-        </p:nvSpPr>
-        <p:spPr>
-          <a:xfrm>
-            <a:off x="5369311" y="4242816"/>
+            <a:off x="5266346" y="3419856"/>
             <a:ext cx="146304" cy="146304"/>
           </a:xfrm>
           <a:prstGeom prst="diamond">
@@ -10927,13 +10066,13 @@
       </p:sp>
       <p:sp>
         <p:nvSpPr>
-          <p:cNvPr id="50" name="TextBox 49"/>
-          <p:cNvSpPr txBox="1"/>
-          <p:nvPr/>
-        </p:nvSpPr>
-        <p:spPr>
-          <a:xfrm>
-            <a:off x="5533903" y="4224528"/>
+          <p:cNvPr id="38" name="TextBox 37"/>
+          <p:cNvSpPr txBox="1"/>
+          <p:nvPr/>
+        </p:nvSpPr>
+        <p:spPr>
+          <a:xfrm>
+            <a:off x="5430938" y="3401568"/>
             <a:ext cx="1280160" cy="164592"/>
           </a:xfrm>
           <a:prstGeom prst="rect">
@@ -10955,14 +10094,14 @@
                 </a:solidFill>
                 <a:latin typeface="Calibri"/>
               </a:rPr>
-              <a:t>Current  (12.3x)</a:t>
-            </a:r>
-          </a:p>
-        </p:txBody>
-      </p:sp>
-      <p:sp>
-        <p:nvSpPr>
-          <p:cNvPr id="51" name="Rectangle 50"/>
+              <a:t>Current  (11.3x)</a:t>
+            </a:r>
+          </a:p>
+        </p:txBody>
+      </p:sp>
+      <p:sp>
+        <p:nvSpPr>
+          <p:cNvPr id="39" name="Rectangle 38"/>
           <p:cNvSpPr/>
           <p:nvPr/>
         </p:nvSpPr>
@@ -11006,7 +10145,7 @@
       </p:sp>
       <p:sp>
         <p:nvSpPr>
-          <p:cNvPr id="52" name="TextBox 51"/>
+          <p:cNvPr id="40" name="TextBox 39"/>
           <p:cNvSpPr txBox="1"/>
           <p:nvPr/>
         </p:nvSpPr>
@@ -11034,14 +10173,14 @@
                 </a:solidFill>
                 <a:latin typeface="Calibri"/>
               </a:rPr>
-              <a:t>PEER COMPARABLES  ·  SELECTED GLOBAL PEERS</a:t>
-            </a:r>
-          </a:p>
-        </p:txBody>
-      </p:sp>
-      <p:sp>
-        <p:nvSpPr>
-          <p:cNvPr id="53" name="TextBox 52"/>
+              <a:t>PEER COMPARABLES  ·  GCC BANK PEERS</a:t>
+            </a:r>
+          </a:p>
+        </p:txBody>
+      </p:sp>
+      <p:sp>
+        <p:nvSpPr>
+          <p:cNvPr id="41" name="TextBox 40"/>
           <p:cNvSpPr txBox="1"/>
           <p:nvPr/>
         </p:nvSpPr>
@@ -11076,7 +10215,7 @@
       </p:sp>
       <p:sp>
         <p:nvSpPr>
-          <p:cNvPr id="54" name="TextBox 53"/>
+          <p:cNvPr id="42" name="TextBox 41"/>
           <p:cNvSpPr txBox="1"/>
           <p:nvPr/>
         </p:nvSpPr>
@@ -11111,7 +10250,7 @@
       </p:sp>
       <p:sp>
         <p:nvSpPr>
-          <p:cNvPr id="55" name="TextBox 54"/>
+          <p:cNvPr id="43" name="TextBox 42"/>
           <p:cNvSpPr txBox="1"/>
           <p:nvPr/>
         </p:nvSpPr>
@@ -11146,7 +10285,7 @@
       </p:sp>
       <p:sp>
         <p:nvSpPr>
-          <p:cNvPr id="56" name="TextBox 55"/>
+          <p:cNvPr id="44" name="TextBox 43"/>
           <p:cNvSpPr txBox="1"/>
           <p:nvPr/>
         </p:nvSpPr>
@@ -11181,7 +10320,7 @@
       </p:sp>
       <p:sp>
         <p:nvSpPr>
-          <p:cNvPr id="57" name="TextBox 56"/>
+          <p:cNvPr id="45" name="TextBox 44"/>
           <p:cNvSpPr txBox="1"/>
           <p:nvPr/>
         </p:nvSpPr>
@@ -11216,7 +10355,7 @@
       </p:sp>
       <p:sp>
         <p:nvSpPr>
-          <p:cNvPr id="58" name="TextBox 57"/>
+          <p:cNvPr id="46" name="TextBox 45"/>
           <p:cNvSpPr txBox="1"/>
           <p:nvPr/>
         </p:nvSpPr>
@@ -11251,7 +10390,7 @@
       </p:sp>
       <p:sp>
         <p:nvSpPr>
-          <p:cNvPr id="59" name="Rectangle 58"/>
+          <p:cNvPr id="47" name="Rectangle 46"/>
           <p:cNvSpPr/>
           <p:nvPr/>
         </p:nvSpPr>
@@ -11295,217 +10434,7 @@
       </p:sp>
       <p:sp>
         <p:nvSpPr>
-          <p:cNvPr id="60" name="TextBox 59"/>
-          <p:cNvSpPr txBox="1"/>
-          <p:nvPr/>
-        </p:nvSpPr>
-        <p:spPr>
-          <a:xfrm>
-            <a:off x="411480" y="5093208"/>
-            <a:ext cx="1874520" cy="256032"/>
-          </a:xfrm>
-          <a:prstGeom prst="rect">
-            <a:avLst/>
-          </a:prstGeom>
-          <a:noFill/>
-        </p:spPr>
-        <p:txBody>
-          <a:bodyPr wrap="square" lIns="0" rIns="0" tIns="0" bIns="0" anchor="t">
-            <a:spAutoFit/>
-          </a:bodyPr>
-          <a:lstStyle/>
-          <a:p>
-            <a:pPr algn="l"/>
-            <a:r>
-              <a:rPr sz="1000" b="0">
-                <a:solidFill>
-                  <a:srgbClr val="1A1A1A"/>
-                </a:solidFill>
-                <a:latin typeface="Calibri"/>
-              </a:rPr>
-              <a:t>iShares MSCI Emerging Markets ETF</a:t>
-            </a:r>
-          </a:p>
-        </p:txBody>
-      </p:sp>
-      <p:sp>
-        <p:nvSpPr>
-          <p:cNvPr id="61" name="TextBox 60"/>
-          <p:cNvSpPr txBox="1"/>
-          <p:nvPr/>
-        </p:nvSpPr>
-        <p:spPr>
-          <a:xfrm>
-            <a:off x="2331720" y="5093208"/>
-            <a:ext cx="960120" cy="256032"/>
-          </a:xfrm>
-          <a:prstGeom prst="rect">
-            <a:avLst/>
-          </a:prstGeom>
-          <a:noFill/>
-        </p:spPr>
-        <p:txBody>
-          <a:bodyPr wrap="square" lIns="0" rIns="0" tIns="0" bIns="0" anchor="t">
-            <a:spAutoFit/>
-          </a:bodyPr>
-          <a:lstStyle/>
-          <a:p>
-            <a:pPr algn="l"/>
-            <a:r>
-              <a:rPr sz="1000" b="0">
-                <a:solidFill>
-                  <a:srgbClr val="1A1A1A"/>
-                </a:solidFill>
-                <a:latin typeface="Calibri"/>
-              </a:rPr>
-              <a:t>EEM</a:t>
-            </a:r>
-          </a:p>
-        </p:txBody>
-      </p:sp>
-      <p:sp>
-        <p:nvSpPr>
-          <p:cNvPr id="62" name="TextBox 61"/>
-          <p:cNvSpPr txBox="1"/>
-          <p:nvPr/>
-        </p:nvSpPr>
-        <p:spPr>
-          <a:xfrm>
-            <a:off x="3337560" y="5093208"/>
-            <a:ext cx="960120" cy="256032"/>
-          </a:xfrm>
-          <a:prstGeom prst="rect">
-            <a:avLst/>
-          </a:prstGeom>
-          <a:noFill/>
-        </p:spPr>
-        <p:txBody>
-          <a:bodyPr wrap="square" lIns="0" rIns="0" tIns="0" bIns="0" anchor="t">
-            <a:spAutoFit/>
-          </a:bodyPr>
-          <a:lstStyle/>
-          <a:p>
-            <a:pPr algn="r"/>
-            <a:r>
-              <a:rPr sz="1000" b="0">
-                <a:solidFill>
-                  <a:srgbClr val="1A1A1A"/>
-                </a:solidFill>
-                <a:latin typeface="Calibri"/>
-              </a:rPr>
-              <a:t>$24.9B</a:t>
-            </a:r>
-          </a:p>
-        </p:txBody>
-      </p:sp>
-      <p:sp>
-        <p:nvSpPr>
-          <p:cNvPr id="63" name="TextBox 62"/>
-          <p:cNvSpPr txBox="1"/>
-          <p:nvPr/>
-        </p:nvSpPr>
-        <p:spPr>
-          <a:xfrm>
-            <a:off x="4343400" y="5093208"/>
-            <a:ext cx="594359" cy="256032"/>
-          </a:xfrm>
-          <a:prstGeom prst="rect">
-            <a:avLst/>
-          </a:prstGeom>
-          <a:noFill/>
-        </p:spPr>
-        <p:txBody>
-          <a:bodyPr wrap="square" lIns="0" rIns="0" tIns="0" bIns="0" anchor="t">
-            <a:spAutoFit/>
-          </a:bodyPr>
-          <a:lstStyle/>
-          <a:p>
-            <a:pPr algn="r"/>
-            <a:r>
-              <a:rPr sz="1000" b="0">
-                <a:solidFill>
-                  <a:srgbClr val="1A1A1A"/>
-                </a:solidFill>
-                <a:latin typeface="Calibri"/>
-              </a:rPr>
-              <a:t>—</a:t>
-            </a:r>
-          </a:p>
-        </p:txBody>
-      </p:sp>
-      <p:sp>
-        <p:nvSpPr>
-          <p:cNvPr id="64" name="TextBox 63"/>
-          <p:cNvSpPr txBox="1"/>
-          <p:nvPr/>
-        </p:nvSpPr>
-        <p:spPr>
-          <a:xfrm>
-            <a:off x="4983480" y="5093208"/>
-            <a:ext cx="685800" cy="256032"/>
-          </a:xfrm>
-          <a:prstGeom prst="rect">
-            <a:avLst/>
-          </a:prstGeom>
-          <a:noFill/>
-        </p:spPr>
-        <p:txBody>
-          <a:bodyPr wrap="square" lIns="0" rIns="0" tIns="0" bIns="0" anchor="t">
-            <a:spAutoFit/>
-          </a:bodyPr>
-          <a:lstStyle/>
-          <a:p>
-            <a:pPr algn="r"/>
-            <a:r>
-              <a:rPr sz="1000" b="0">
-                <a:solidFill>
-                  <a:srgbClr val="1A1A1A"/>
-                </a:solidFill>
-                <a:latin typeface="Calibri"/>
-              </a:rPr>
-              <a:t>+33.3% YTD</a:t>
-            </a:r>
-          </a:p>
-        </p:txBody>
-      </p:sp>
-      <p:sp>
-        <p:nvSpPr>
-          <p:cNvPr id="65" name="TextBox 64"/>
-          <p:cNvSpPr txBox="1"/>
-          <p:nvPr/>
-        </p:nvSpPr>
-        <p:spPr>
-          <a:xfrm>
-            <a:off x="5715000" y="5093208"/>
-            <a:ext cx="685800" cy="256032"/>
-          </a:xfrm>
-          <a:prstGeom prst="rect">
-            <a:avLst/>
-          </a:prstGeom>
-          <a:noFill/>
-        </p:spPr>
-        <p:txBody>
-          <a:bodyPr wrap="square" lIns="0" rIns="0" tIns="0" bIns="0" anchor="t">
-            <a:spAutoFit/>
-          </a:bodyPr>
-          <a:lstStyle/>
-          <a:p>
-            <a:pPr algn="r"/>
-            <a:r>
-              <a:rPr sz="1000" b="0">
-                <a:solidFill>
-                  <a:srgbClr val="2F7D4F"/>
-                </a:solidFill>
-                <a:latin typeface="Calibri"/>
-              </a:rPr>
-              <a:t>+31.9%</a:t>
-            </a:r>
-          </a:p>
-        </p:txBody>
-      </p:sp>
-      <p:sp>
-        <p:nvSpPr>
-          <p:cNvPr id="66" name="Rectangle 65"/>
+          <p:cNvPr id="48" name="Rectangle 47"/>
           <p:cNvSpPr/>
           <p:nvPr/>
         </p:nvSpPr>
@@ -11549,7 +10478,7 @@
       </p:sp>
       <p:sp>
         <p:nvSpPr>
-          <p:cNvPr id="67" name="TextBox 66"/>
+          <p:cNvPr id="49" name="TextBox 48"/>
           <p:cNvSpPr txBox="1"/>
           <p:nvPr/>
         </p:nvSpPr>
@@ -11584,7 +10513,7 @@
       </p:sp>
       <p:sp>
         <p:nvSpPr>
-          <p:cNvPr id="68" name="Rectangle 67"/>
+          <p:cNvPr id="50" name="Rectangle 49"/>
           <p:cNvSpPr/>
           <p:nvPr/>
         </p:nvSpPr>
@@ -11630,7 +10559,7 @@
       </p:sp>
       <p:sp>
         <p:nvSpPr>
-          <p:cNvPr id="69" name="Rectangle 68"/>
+          <p:cNvPr id="51" name="Rectangle 50"/>
           <p:cNvSpPr/>
           <p:nvPr/>
         </p:nvSpPr>
@@ -11674,7 +10603,7 @@
       </p:sp>
       <p:sp>
         <p:nvSpPr>
-          <p:cNvPr id="70" name="TextBox 69"/>
+          <p:cNvPr id="52" name="TextBox 51"/>
           <p:cNvSpPr txBox="1"/>
           <p:nvPr/>
         </p:nvSpPr>
@@ -11709,7 +10638,7 @@
       </p:sp>
       <p:sp>
         <p:nvSpPr>
-          <p:cNvPr id="71" name="Rectangle 70"/>
+          <p:cNvPr id="53" name="Rectangle 52"/>
           <p:cNvSpPr/>
           <p:nvPr/>
         </p:nvSpPr>
@@ -11752,7 +10681,7 @@
       </p:sp>
       <p:sp>
         <p:nvSpPr>
-          <p:cNvPr id="72" name="Rectangle 71"/>
+          <p:cNvPr id="54" name="Rectangle 53"/>
           <p:cNvSpPr/>
           <p:nvPr/>
         </p:nvSpPr>
@@ -11795,7 +10724,7 @@
       </p:sp>
       <p:sp>
         <p:nvSpPr>
-          <p:cNvPr id="73" name="TextBox 72"/>
+          <p:cNvPr id="55" name="TextBox 54"/>
           <p:cNvSpPr txBox="1"/>
           <p:nvPr/>
         </p:nvSpPr>
@@ -11830,7 +10759,7 @@
       </p:sp>
       <p:sp>
         <p:nvSpPr>
-          <p:cNvPr id="74" name="TextBox 73"/>
+          <p:cNvPr id="56" name="TextBox 55"/>
           <p:cNvSpPr txBox="1"/>
           <p:nvPr/>
         </p:nvSpPr>
@@ -11865,7 +10794,7 @@
       </p:sp>
       <p:sp>
         <p:nvSpPr>
-          <p:cNvPr id="75" name="Rectangle 74"/>
+          <p:cNvPr id="57" name="Rectangle 56"/>
           <p:cNvSpPr/>
           <p:nvPr/>
         </p:nvSpPr>
@@ -11911,7 +10840,7 @@
       </p:sp>
       <p:sp>
         <p:nvSpPr>
-          <p:cNvPr id="76" name="Rectangle 75"/>
+          <p:cNvPr id="58" name="Rectangle 57"/>
           <p:cNvSpPr/>
           <p:nvPr/>
         </p:nvSpPr>
@@ -11955,7 +10884,7 @@
       </p:sp>
       <p:sp>
         <p:nvSpPr>
-          <p:cNvPr id="77" name="TextBox 76"/>
+          <p:cNvPr id="59" name="TextBox 58"/>
           <p:cNvSpPr txBox="1"/>
           <p:nvPr/>
         </p:nvSpPr>
@@ -11990,7 +10919,7 @@
       </p:sp>
       <p:sp>
         <p:nvSpPr>
-          <p:cNvPr id="78" name="TextBox 77"/>
+          <p:cNvPr id="60" name="TextBox 59"/>
           <p:cNvSpPr txBox="1"/>
           <p:nvPr/>
         </p:nvSpPr>
@@ -12025,7 +10954,7 @@
       </p:sp>
       <p:sp>
         <p:nvSpPr>
-          <p:cNvPr id="79" name="TextBox 78"/>
+          <p:cNvPr id="61" name="TextBox 60"/>
           <p:cNvSpPr txBox="1"/>
           <p:nvPr/>
         </p:nvSpPr>
@@ -12053,14 +10982,14 @@
                 </a:solidFill>
                 <a:latin typeface="Calibri"/>
               </a:rPr>
-              <a:t>Range  OMR 0 — 1</a:t>
-            </a:r>
-          </a:p>
-        </p:txBody>
-      </p:sp>
-      <p:sp>
-        <p:nvSpPr>
-          <p:cNvPr id="80" name="TextBox 79"/>
+              <a:t>Range  OMR 0.390 — 0.520</a:t>
+            </a:r>
+          </a:p>
+        </p:txBody>
+      </p:sp>
+      <p:sp>
+        <p:nvSpPr>
+          <p:cNvPr id="62" name="TextBox 61"/>
           <p:cNvSpPr txBox="1"/>
           <p:nvPr/>
         </p:nvSpPr>
@@ -12088,14 +11017,14 @@
                 </a:solidFill>
                 <a:latin typeface="Calibri"/>
               </a:rPr>
-              <a:t>Implied +4.9% vs last close</a:t>
-            </a:r>
-          </a:p>
-        </p:txBody>
-      </p:sp>
-      <p:sp>
-        <p:nvSpPr>
-          <p:cNvPr id="81" name="Rectangle 80"/>
+              <a:t>Implied +14.7% vs last close</a:t>
+            </a:r>
+          </a:p>
+        </p:txBody>
+      </p:sp>
+      <p:sp>
+        <p:nvSpPr>
+          <p:cNvPr id="63" name="Rectangle 62"/>
           <p:cNvSpPr/>
           <p:nvPr/>
         </p:nvSpPr>
@@ -12141,7 +11070,7 @@
       </p:sp>
       <p:sp>
         <p:nvSpPr>
-          <p:cNvPr id="82" name="Rectangle 81"/>
+          <p:cNvPr id="64" name="Rectangle 63"/>
           <p:cNvSpPr/>
           <p:nvPr/>
         </p:nvSpPr>
@@ -12185,7 +11114,7 @@
       </p:sp>
       <p:sp>
         <p:nvSpPr>
-          <p:cNvPr id="83" name="TextBox 82"/>
+          <p:cNvPr id="65" name="TextBox 64"/>
           <p:cNvSpPr txBox="1"/>
           <p:nvPr/>
         </p:nvSpPr>
@@ -12220,7 +11149,7 @@
       </p:sp>
       <p:sp>
         <p:nvSpPr>
-          <p:cNvPr id="84" name="TextBox 83"/>
+          <p:cNvPr id="66" name="TextBox 65"/>
           <p:cNvSpPr txBox="1"/>
           <p:nvPr/>
         </p:nvSpPr>
@@ -12255,7 +11184,7 @@
       </p:sp>
       <p:sp>
         <p:nvSpPr>
-          <p:cNvPr id="85" name="Rectangle 84"/>
+          <p:cNvPr id="67" name="Rectangle 66"/>
           <p:cNvSpPr/>
           <p:nvPr/>
         </p:nvSpPr>
@@ -12299,7 +11228,7 @@
       </p:sp>
       <p:sp>
         <p:nvSpPr>
-          <p:cNvPr id="86" name="TextBox 85"/>
+          <p:cNvPr id="68" name="TextBox 67"/>
           <p:cNvSpPr txBox="1"/>
           <p:nvPr/>
         </p:nvSpPr>
@@ -12327,14 +11256,14 @@
                 </a:solidFill>
                 <a:latin typeface="Calibri"/>
               </a:rPr>
-              <a:t>Source: investing, ishares, marketscreener  |  Generated 14 May 2026  |  Analyst: Jabal Research</a:t>
-            </a:r>
-          </a:p>
-        </p:txBody>
-      </p:sp>
-      <p:sp>
-        <p:nvSpPr>
-          <p:cNvPr id="87" name="TextBox 86"/>
+              <a:t>Source: Investing.com, MarketScreener, World Bank / IMF, iShares  |  Generated 17 May 2026  |  Analyst: Jabal Research</a:t>
+            </a:r>
+          </a:p>
+        </p:txBody>
+      </p:sp>
+      <p:sp>
+        <p:nvSpPr>
+          <p:cNvPr id="69" name="TextBox 68"/>
           <p:cNvSpPr txBox="1"/>
           <p:nvPr/>
         </p:nvSpPr>
@@ -12369,7 +11298,7 @@
       </p:sp>
       <p:sp>
         <p:nvSpPr>
-          <p:cNvPr id="88" name="TextBox 87"/>
+          <p:cNvPr id="70" name="TextBox 69"/>
           <p:cNvSpPr txBox="1"/>
           <p:nvPr/>
         </p:nvSpPr>
@@ -12404,7 +11333,7 @@
       </p:sp>
       <p:sp>
         <p:nvSpPr>
-          <p:cNvPr id="89" name="TextBox 88"/>
+          <p:cNvPr id="71" name="TextBox 70"/>
           <p:cNvSpPr txBox="1"/>
           <p:nvPr/>
         </p:nvSpPr>
